--- a/assets/memos/E6-memo.pptx
+++ b/assets/memos/E6-memo.pptx
@@ -3105,8 +3105,8 @@
         </p:nvSpPr>
         <p:spPr>
           <a:xfrm>
-            <a:off x="648000" y="1180800"/>
-            <a:ext cx="5058000" cy="511200"/>
+            <a:off x="532800" y="1180800"/>
+            <a:ext cx="6490800" cy="511200"/>
           </a:xfrm>
           <a:prstGeom prst="rect">
             <a:avLst/>
@@ -3128,7 +3128,7 @@
               </a:spcAft>
             </a:pPr>
             <a:r>
-              <a:rPr sz="2000" b="1" i="0">
+              <a:rPr sz="1800" b="1" i="0">
                 <a:solidFill>
                   <a:srgbClr val="4388BC"/>
                 </a:solidFill>
@@ -4562,8 +4562,8 @@
         </p:nvSpPr>
         <p:spPr>
           <a:xfrm>
-            <a:off x="648000" y="1180800"/>
-            <a:ext cx="5058000" cy="511200"/>
+            <a:off x="532800" y="1180800"/>
+            <a:ext cx="6490800" cy="511200"/>
           </a:xfrm>
           <a:prstGeom prst="rect">
             <a:avLst/>
@@ -4585,7 +4585,7 @@
               </a:spcAft>
             </a:pPr>
             <a:r>
-              <a:rPr sz="2000" b="1" i="0">
+              <a:rPr sz="1800" b="1" i="0">
                 <a:solidFill>
                   <a:srgbClr val="4388BC"/>
                 </a:solidFill>

--- a/assets/memos/E6-memo.pptx
+++ b/assets/memos/E6-memo.pptx
@@ -3153,7 +3153,7 @@
                 </a:solidFill>
                 <a:latin typeface="Arial"/>
               </a:rPr>
-              <a:t>Le numérique : un secteur qui pèse lourd | Nos appareils : le cœur du problème | L'usage quotidien : des impacts souvent invis…</a:t>
+              <a:t>Le numérique : un secteur qui pèse lourd | Nos appareils : le cœur du problème | L'usage quotidien : des impacts souvent invisibles</a:t>
             </a:r>
           </a:p>
         </p:txBody>
@@ -3402,7 +3402,7 @@
                 </a:solidFill>
                 <a:latin typeface="Arial"/>
               </a:rPr>
-              <a:t>→ On l'oublie souvent, mais le numérique est l'un des secteurs les …</a:t>
+              <a:t>→ On l'oublie souvent, mais le numérique est l'un des secteurs les plus émetteurs de gaz à effet de serre au monde. Et sa croissance est rapide.</a:t>
             </a:r>
           </a:p>
           <a:p>
@@ -3440,7 +3440,7 @@
                 </a:solidFill>
                 <a:latin typeface="Arial"/>
               </a:rPr>
-              <a:t>→ Le numérique représente aujourd'hui environ 4 % des émissions mon…</a:t>
+              <a:t>→ Le numérique représente aujourd'hui environ 4 % des émissions mondiales de CO — autant que l'aviation civile.</a:t>
             </a:r>
           </a:p>
           <a:p>
@@ -3708,7 +3708,7 @@
                 </a:solidFill>
                 <a:latin typeface="Arial"/>
               </a:rPr>
-              <a:t>→ La fabrication de nos appareils numériques est de loin la source …</a:t>
+              <a:t>→ La fabrication de nos appareils numériques est de loin la source d'impact la plus importante — bien plus que leur utilisation quotidienne.</a:t>
             </a:r>
           </a:p>
           <a:p>
@@ -3746,7 +3746,7 @@
                 </a:solidFill>
                 <a:latin typeface="Arial"/>
               </a:rPr>
-              <a:t>→ Fabriquer un smartphone émet en moyenne 70 kg de CO — soit l'équi…</a:t>
+              <a:t>→ Fabriquer un smartphone émet en moyenne 70 kg de CO — soit l'équivalent de 700 km en voiture, ou d'un vol Paris–Marseille. Et 80 % de cet impact vient de la fabrication, pas de l'usage.</a:t>
             </a:r>
           </a:p>
           <a:p>
@@ -3972,7 +3972,7 @@
                 </a:solidFill>
                 <a:latin typeface="Arial"/>
               </a:rPr>
-              <a:t>L'usage quotidien : des impacts souvent invis…</a:t>
+              <a:t>L'usage quotidien : des impacts souvent invisibles</a:t>
             </a:r>
           </a:p>
         </p:txBody>
@@ -4033,7 +4033,7 @@
                 </a:solidFill>
                 <a:latin typeface="Arial"/>
               </a:rPr>
-              <a:t>→ Regarder une heure de vidéo en streaming émet environ 36 g de CO …</a:t>
+              <a:t>→ Regarder une heure de vidéo en streaming émet environ 36 g de CO — soit à peu près 1 km en voiture. Multiplié par des milliards d'utilisateurs, l'impact devient colossal.</a:t>
             </a:r>
           </a:p>
           <a:p>
@@ -4052,7 +4052,7 @@
                 </a:solidFill>
                 <a:latin typeface="Arial"/>
               </a:rPr>
-              <a:t>→ La qualité HD et 4K consomme 3 à 4 fois plus de données qu'une vi…</a:t>
+              <a:t>→ La qualité HD et 4K consomme 3 à 4 fois plus de données qu'une vidéo en définition standard.</a:t>
             </a:r>
           </a:p>
           <a:p>
@@ -4320,7 +4320,7 @@
                 </a:solidFill>
                 <a:latin typeface="Arial"/>
               </a:rPr>
-              <a:t>→ Ces infrastructures discrètes sont le moteur de notre monde numér…</a:t>
+              <a:t>→ Ces infrastructures discrètes sont le moteur de notre monde numérique, hébergeant nos données et applications. Cependant, leur fonctionnement est incroyablement gourmand en ressources, notamment pour le refroidissement des serveurs et le maintien d'une température stable.</a:t>
             </a:r>
           </a:p>
           <a:p>
@@ -4358,7 +4358,7 @@
                 </a:solidFill>
                 <a:latin typeface="Arial"/>
               </a:rPr>
-              <a:t>→ Pour chaque kilowatt-heure d'électricité consommée par un data ce…</a:t>
+              <a:t>→ Pour chaque kilowatt-heure d'électricité consommée par un data center, entre 1 et 3 litres d'eau sont utilisés pour le refroidissement des serveurs. Une consommation équivalente à une douche de 5 minutes toutes les 30 secondes pour un centre moyen.</a:t>
             </a:r>
           </a:p>
           <a:p>
@@ -4610,7 +4610,7 @@
                 </a:solidFill>
                 <a:latin typeface="Arial"/>
               </a:rPr>
-              <a:t>Le numérique : un secteur qui pèse lourd | Nos appareils : le cœur du problème | L'usage quotidien : des impacts souvent invis…</a:t>
+              <a:t>Le numérique : un secteur qui pèse lourd | Nos appareils : le cœur du problème | L'usage quotidien : des impacts souvent invisibles</a:t>
             </a:r>
           </a:p>
         </p:txBody>
@@ -4859,7 +4859,7 @@
                 </a:solidFill>
                 <a:latin typeface="Arial"/>
               </a:rPr>
-              <a:t>→ Les Déchets d'Équipements Électriques et Électroniques (DEEE), ou…</a:t>
+              <a:t>→ Les Déchets d'Équipements Électriques et Électroniques (DEEE), ou "e-waste", représentent aujourd'hui le flux de déchets qui croît le plus rapidement dans le monde. C'est une problématique environnementale et sanitaire majeure.</a:t>
             </a:r>
           </a:p>
           <a:p>
@@ -4897,7 +4897,7 @@
                 </a:solidFill>
                 <a:latin typeface="Arial"/>
               </a:rPr>
-              <a:t>→ Chaque année, la planète génère un volume colossal de déchets éle…</a:t>
+              <a:t>→ Chaque année, la planète génère un volume colossal de déchets électroniques, équivalent à jeter 1000 ordinateurs portables chaque seconde.</a:t>
             </a:r>
           </a:p>
           <a:p>
@@ -5165,7 +5165,7 @@
                 </a:solidFill>
                 <a:latin typeface="Arial"/>
               </a:rPr>
-              <a:t>→ L'obsolescence, qu'elle soit programmée ou perçue, est un facteur…</a:t>
+              <a:t>→ L'obsolescence, qu'elle soit programmée ou perçue, est un facteur majeur de l'empreinte environnementale du numérique. Elle nous pousse à renouveler nos appareils bien avant la fin de leur durée de vie potentielle.</a:t>
             </a:r>
           </a:p>
           <a:p>
@@ -5203,7 +5203,7 @@
                 </a:solidFill>
                 <a:latin typeface="Arial"/>
               </a:rPr>
-              <a:t>→ Les produits sont conçus pour avoir une durée de vie limitée, par…</a:t>
+              <a:t>→ Les produits sont conçus pour avoir une durée de vie limitée, par des composants fragiles, une mise à jour logicielle impossible, ou une réparabilité rendue délibérément difficile ou coûteuse.</a:t>
             </a:r>
           </a:p>
           <a:p>
@@ -5471,7 +5471,7 @@
                 </a:solidFill>
                 <a:latin typeface="Arial"/>
               </a:rPr>
-              <a:t>→ Plutôt que de céder à l'obsolescence programmée ou perçue, adopto…</a:t>
+              <a:t>→ Plutôt que de céder à l'obsolescence programmée ou perçue, adoptons des gestes simples pour prolonger la durée de vie de nos équipements. Chaque année gagnée, c'est une réduction significative de leur empreinte environnementale.</a:t>
             </a:r>
           </a:p>
           <a:p>
@@ -5509,7 +5509,7 @@
                 </a:solidFill>
                 <a:latin typeface="Arial"/>
               </a:rPr>
-              <a:t>→ De plus en plus de services et de tutoriels existent. Un petit co…</a:t>
+              <a:t>→ De plus en plus de services et de tutoriels existent. Un petit composant défectueux ne doit pas condamner tout un appareil. Pensez aux ateliers de réparation ou aux associations.</a:t>
             </a:r>
           </a:p>
           <a:p>
@@ -5696,7 +5696,7 @@
                 </a:solidFill>
                 <a:latin typeface="Arial"/>
               </a:rPr>
-              <a:t>→ Derrière chaque écran, chaque circuit imprimé, se cache un monde …</a:t>
+              <a:t>→ Derrière chaque écran, chaque circuit imprimé, se cache un monde de minerais et de métaux rares, dont l'extraction a des conséquences environnementales et sociales souvent dramatiques.</a:t>
             </a:r>
           </a:p>
           <a:p>
@@ -5734,7 +5734,7 @@
                 </a:solidFill>
                 <a:latin typeface="Arial"/>
               </a:rPr>
-              <a:t>→ Nos appareils dépendent de ressources comme le lithium (batteries…</a:t>
+              <a:t>→ Nos appareils dépendent de ressources comme le lithium (batteries), le cobalt (batteries, puces), le coltan (condensateurs), l'or, l'argent, le cuivre... L'extraction de ces 70+ métaux est très énergivore et souvent localisée dans des zones politiquement instables.</a:t>
             </a:r>
           </a:p>
           <a:p>
@@ -5921,7 +5921,7 @@
                 </a:solidFill>
                 <a:latin typeface="Arial"/>
               </a:rPr>
-              <a:t>→ Intégrer le numérique responsable au sein de votre organisation p…</a:t>
+              <a:t>→ Intégrer le numérique responsable au sein de votre organisation permet de réduire votre empreinte environnementale tout en optimisant vos coûts et en engageant vos équipes. Voici des pistes concrètes pour agir.</a:t>
             </a:r>
           </a:p>
           <a:p>
@@ -5959,7 +5959,7 @@
                 </a:solidFill>
                 <a:latin typeface="Arial"/>
               </a:rPr>
-              <a:t>→ Privilégiez les équipements reconditionnés ou conçus pour durer. …</a:t>
+              <a:t>→ Privilégiez les équipements reconditionnés ou conçus pour durer. Demandez des garanties de réparabilité et de disponibilité des pièces détachées à vos fournisseurs.</a:t>
             </a:r>
           </a:p>
           <a:p>
@@ -6146,7 +6146,7 @@
                 </a:solidFill>
                 <a:latin typeface="Arial"/>
               </a:rPr>
-              <a:t>→ Le numérique responsable, c'est l'affaire de tous. Chaque geste c…</a:t>
+              <a:t>→ Le numérique responsable, c'est l'affaire de tous. Chaque geste compte, chaque appareil prolongé, chaque donnée nettoyée contribue à un avenir plus durable.</a:t>
             </a:r>
           </a:p>
           <a:p>
@@ -6165,7 +6165,7 @@
                 </a:solidFill>
                 <a:latin typeface="Arial"/>
               </a:rPr>
-              <a:t>→ ADEME-Arcep, Évaluation de l'impact environnemental du numérique …</a:t>
+              <a:t>→ ADEME-Arcep, Évaluation de l'impact environnemental du numérique en France, Janvier 2025 — librairie.ademe.fr</a:t>
             </a:r>
           </a:p>
           <a:p>
@@ -6203,7 +6203,7 @@
                 </a:solidFill>
                 <a:latin typeface="Arial"/>
               </a:rPr>
-              <a:t>→ Agence Internationale de l'Énergie (AIE), Electricity 2024 — iea.…</a:t>
+              <a:t>→ Agence Internationale de l'Énergie (AIE), Electricity 2024 — iea.org</a:t>
             </a:r>
           </a:p>
         </p:txBody>

--- a/assets/memos/E6-memo.pptx
+++ b/assets/memos/E6-memo.pptx
@@ -3167,7 +3167,7 @@
         <p:spPr>
           <a:xfrm>
             <a:off x="532800" y="1749600"/>
-            <a:ext cx="6490800" cy="1371600"/>
+            <a:ext cx="6490800" cy="1533600"/>
           </a:xfrm>
           <a:prstGeom prst="rect">
             <a:avLst/>
@@ -3208,7 +3208,7 @@
         <p:spPr>
           <a:xfrm>
             <a:off x="532800" y="1749600"/>
-            <a:ext cx="572400" cy="1371600"/>
+            <a:ext cx="572400" cy="1533600"/>
           </a:xfrm>
           <a:prstGeom prst="rect">
             <a:avLst/>
@@ -3374,7 +3374,7 @@
         <p:spPr>
           <a:xfrm>
             <a:off x="1159200" y="2214000"/>
-            <a:ext cx="5828400" cy="885600"/>
+            <a:ext cx="5828400" cy="1033199"/>
           </a:xfrm>
           <a:prstGeom prst="rect">
             <a:avLst/>
@@ -3472,8 +3472,8 @@
         </p:nvSpPr>
         <p:spPr>
           <a:xfrm>
-            <a:off x="532800" y="3186000"/>
-            <a:ext cx="6490800" cy="1371600"/>
+            <a:off x="532800" y="3348000"/>
+            <a:ext cx="6490800" cy="1684800"/>
           </a:xfrm>
           <a:prstGeom prst="rect">
             <a:avLst/>
@@ -3513,8 +3513,8 @@
         </p:nvSpPr>
         <p:spPr>
           <a:xfrm>
-            <a:off x="532800" y="3186000"/>
-            <a:ext cx="572400" cy="1371600"/>
+            <a:off x="532800" y="3348000"/>
+            <a:ext cx="572400" cy="1684800"/>
           </a:xfrm>
           <a:prstGeom prst="rect">
             <a:avLst/>
@@ -3554,7 +3554,7 @@
         </p:nvSpPr>
         <p:spPr>
           <a:xfrm>
-            <a:off x="1206000" y="3607200"/>
+            <a:off x="1206000" y="3769200"/>
             <a:ext cx="5752800" cy="7200"/>
           </a:xfrm>
           <a:prstGeom prst="rect">
@@ -3595,7 +3595,7 @@
         </p:nvSpPr>
         <p:spPr>
           <a:xfrm>
-            <a:off x="532800" y="3252600"/>
+            <a:off x="532800" y="3414600"/>
             <a:ext cx="572400" cy="288000"/>
           </a:xfrm>
           <a:prstGeom prst="rect">
@@ -3637,7 +3637,7 @@
         </p:nvSpPr>
         <p:spPr>
           <a:xfrm>
-            <a:off x="1177200" y="3221999"/>
+            <a:off x="1177200" y="3384000"/>
             <a:ext cx="5810400" cy="370799"/>
           </a:xfrm>
           <a:prstGeom prst="rect">
@@ -3679,8 +3679,8 @@
         </p:nvSpPr>
         <p:spPr>
           <a:xfrm>
-            <a:off x="1159200" y="3650399"/>
-            <a:ext cx="5828400" cy="885600"/>
+            <a:off x="1159200" y="3812400"/>
+            <a:ext cx="5828400" cy="1184399"/>
           </a:xfrm>
           <a:prstGeom prst="rect">
             <a:avLst/>
@@ -3778,8 +3778,8 @@
         </p:nvSpPr>
         <p:spPr>
           <a:xfrm>
-            <a:off x="532800" y="4622400"/>
-            <a:ext cx="6490800" cy="1371600"/>
+            <a:off x="532800" y="5097600"/>
+            <a:ext cx="6490800" cy="1684800"/>
           </a:xfrm>
           <a:prstGeom prst="rect">
             <a:avLst/>
@@ -3819,8 +3819,8 @@
         </p:nvSpPr>
         <p:spPr>
           <a:xfrm>
-            <a:off x="532800" y="4622400"/>
-            <a:ext cx="572400" cy="1371600"/>
+            <a:off x="532800" y="5097600"/>
+            <a:ext cx="572400" cy="1684800"/>
           </a:xfrm>
           <a:prstGeom prst="rect">
             <a:avLst/>
@@ -3860,7 +3860,7 @@
         </p:nvSpPr>
         <p:spPr>
           <a:xfrm>
-            <a:off x="1206000" y="5043600"/>
+            <a:off x="1206000" y="5518800"/>
             <a:ext cx="5752800" cy="7200"/>
           </a:xfrm>
           <a:prstGeom prst="rect">
@@ -3901,7 +3901,7 @@
         </p:nvSpPr>
         <p:spPr>
           <a:xfrm>
-            <a:off x="532800" y="4689000"/>
+            <a:off x="532800" y="5164200"/>
             <a:ext cx="572400" cy="288000"/>
           </a:xfrm>
           <a:prstGeom prst="rect">
@@ -3943,7 +3943,7 @@
         </p:nvSpPr>
         <p:spPr>
           <a:xfrm>
-            <a:off x="1177200" y="4658400"/>
+            <a:off x="1177200" y="5133600"/>
             <a:ext cx="5810400" cy="370799"/>
           </a:xfrm>
           <a:prstGeom prst="rect">
@@ -3985,8 +3985,8 @@
         </p:nvSpPr>
         <p:spPr>
           <a:xfrm>
-            <a:off x="1159200" y="5086800"/>
-            <a:ext cx="5828400" cy="885600"/>
+            <a:off x="1159200" y="5562000"/>
+            <a:ext cx="5828400" cy="1184399"/>
           </a:xfrm>
           <a:prstGeom prst="rect">
             <a:avLst/>
@@ -4079,312 +4079,6 @@
       <p:sp>
         <p:nvSpPr>
           <p:cNvPr id="21" name="Rectangle 20"/>
-          <p:cNvSpPr/>
-          <p:nvPr/>
-        </p:nvSpPr>
-        <p:spPr>
-          <a:xfrm>
-            <a:off x="532800" y="6058799"/>
-            <a:ext cx="6490800" cy="1371600"/>
-          </a:xfrm>
-          <a:prstGeom prst="rect">
-            <a:avLst/>
-          </a:prstGeom>
-          <a:solidFill>
-            <a:srgbClr val="EBF7F6"/>
-          </a:solidFill>
-          <a:ln>
-            <a:noFill/>
-          </a:ln>
-        </p:spPr>
-        <p:style>
-          <a:lnRef idx="1">
-            <a:schemeClr val="accent1"/>
-          </a:lnRef>
-          <a:fillRef idx="3">
-            <a:schemeClr val="accent1"/>
-          </a:fillRef>
-          <a:effectRef idx="2">
-            <a:schemeClr val="accent1"/>
-          </a:effectRef>
-          <a:fontRef idx="minor">
-            <a:schemeClr val="lt1"/>
-          </a:fontRef>
-        </p:style>
-        <p:txBody>
-          <a:bodyPr rtlCol="0" anchor="ctr"/>
-          <a:lstStyle/>
-          <a:p/>
-        </p:txBody>
-      </p:sp>
-      <p:sp>
-        <p:nvSpPr>
-          <p:cNvPr id="22" name="Rectangle 21"/>
-          <p:cNvSpPr/>
-          <p:nvPr/>
-        </p:nvSpPr>
-        <p:spPr>
-          <a:xfrm>
-            <a:off x="532800" y="6058799"/>
-            <a:ext cx="572400" cy="1371600"/>
-          </a:xfrm>
-          <a:prstGeom prst="rect">
-            <a:avLst/>
-          </a:prstGeom>
-          <a:solidFill>
-            <a:srgbClr val="187C88"/>
-          </a:solidFill>
-          <a:ln>
-            <a:noFill/>
-          </a:ln>
-        </p:spPr>
-        <p:style>
-          <a:lnRef idx="1">
-            <a:schemeClr val="accent1"/>
-          </a:lnRef>
-          <a:fillRef idx="3">
-            <a:schemeClr val="accent1"/>
-          </a:fillRef>
-          <a:effectRef idx="2">
-            <a:schemeClr val="accent1"/>
-          </a:effectRef>
-          <a:fontRef idx="minor">
-            <a:schemeClr val="lt1"/>
-          </a:fontRef>
-        </p:style>
-        <p:txBody>
-          <a:bodyPr rtlCol="0" anchor="ctr"/>
-          <a:lstStyle/>
-          <a:p/>
-        </p:txBody>
-      </p:sp>
-      <p:sp>
-        <p:nvSpPr>
-          <p:cNvPr id="23" name="Rectangle 22"/>
-          <p:cNvSpPr/>
-          <p:nvPr/>
-        </p:nvSpPr>
-        <p:spPr>
-          <a:xfrm>
-            <a:off x="1206000" y="6480000"/>
-            <a:ext cx="5752800" cy="7200"/>
-          </a:xfrm>
-          <a:prstGeom prst="rect">
-            <a:avLst/>
-          </a:prstGeom>
-          <a:solidFill>
-            <a:srgbClr val="DDDDDD"/>
-          </a:solidFill>
-          <a:ln>
-            <a:noFill/>
-          </a:ln>
-        </p:spPr>
-        <p:style>
-          <a:lnRef idx="1">
-            <a:schemeClr val="accent1"/>
-          </a:lnRef>
-          <a:fillRef idx="3">
-            <a:schemeClr val="accent1"/>
-          </a:fillRef>
-          <a:effectRef idx="2">
-            <a:schemeClr val="accent1"/>
-          </a:effectRef>
-          <a:fontRef idx="minor">
-            <a:schemeClr val="lt1"/>
-          </a:fontRef>
-        </p:style>
-        <p:txBody>
-          <a:bodyPr rtlCol="0" anchor="ctr"/>
-          <a:lstStyle/>
-          <a:p/>
-        </p:txBody>
-      </p:sp>
-      <p:sp>
-        <p:nvSpPr>
-          <p:cNvPr id="24" name="TextBox 23"/>
-          <p:cNvSpPr txBox="1"/>
-          <p:nvPr/>
-        </p:nvSpPr>
-        <p:spPr>
-          <a:xfrm>
-            <a:off x="532800" y="6125399"/>
-            <a:ext cx="572400" cy="288000"/>
-          </a:xfrm>
-          <a:prstGeom prst="rect">
-            <a:avLst/>
-          </a:prstGeom>
-          <a:noFill/>
-        </p:spPr>
-        <p:txBody>
-          <a:bodyPr wrap="square" tIns="0" bIns="0" lIns="18000" rIns="18000">
-            <a:spAutoFit/>
-          </a:bodyPr>
-          <a:lstStyle/>
-          <a:p>
-            <a:pPr algn="ctr">
-              <a:spcBef>
-                <a:spcPts val="0"/>
-              </a:spcBef>
-              <a:spcAft>
-                <a:spcPts val="100"/>
-              </a:spcAft>
-            </a:pPr>
-            <a:r>
-              <a:rPr sz="2200" b="1" i="0">
-                <a:solidFill>
-                  <a:srgbClr val="FFFFFF"/>
-                </a:solidFill>
-                <a:latin typeface="Arial"/>
-              </a:rPr>
-              <a:t>4</a:t>
-            </a:r>
-          </a:p>
-        </p:txBody>
-      </p:sp>
-      <p:sp>
-        <p:nvSpPr>
-          <p:cNvPr id="25" name="TextBox 24"/>
-          <p:cNvSpPr txBox="1"/>
-          <p:nvPr/>
-        </p:nvSpPr>
-        <p:spPr>
-          <a:xfrm>
-            <a:off x="1177200" y="6094800"/>
-            <a:ext cx="5810400" cy="370799"/>
-          </a:xfrm>
-          <a:prstGeom prst="rect">
-            <a:avLst/>
-          </a:prstGeom>
-          <a:noFill/>
-        </p:spPr>
-        <p:txBody>
-          <a:bodyPr wrap="square" tIns="0" bIns="0" lIns="18000" rIns="18000">
-            <a:spAutoFit/>
-          </a:bodyPr>
-          <a:lstStyle/>
-          <a:p>
-            <a:pPr algn="l">
-              <a:spcBef>
-                <a:spcPts val="0"/>
-              </a:spcBef>
-              <a:spcAft>
-                <a:spcPts val="100"/>
-              </a:spcAft>
-            </a:pPr>
-            <a:r>
-              <a:rPr sz="1100" b="1" i="0">
-                <a:solidFill>
-                  <a:srgbClr val="187C88"/>
-                </a:solidFill>
-                <a:latin typeface="Arial"/>
-              </a:rPr>
-              <a:t>Les data centers : des usines énergivores</a:t>
-            </a:r>
-          </a:p>
-        </p:txBody>
-      </p:sp>
-      <p:sp>
-        <p:nvSpPr>
-          <p:cNvPr id="26" name="TextBox 25"/>
-          <p:cNvSpPr txBox="1"/>
-          <p:nvPr/>
-        </p:nvSpPr>
-        <p:spPr>
-          <a:xfrm>
-            <a:off x="1159200" y="6523200"/>
-            <a:ext cx="5828400" cy="885600"/>
-          </a:xfrm>
-          <a:prstGeom prst="rect">
-            <a:avLst/>
-          </a:prstGeom>
-          <a:noFill/>
-        </p:spPr>
-        <p:txBody>
-          <a:bodyPr wrap="square" tIns="0" bIns="0" lIns="18000" rIns="18000">
-            <a:spAutoFit/>
-          </a:bodyPr>
-          <a:lstStyle/>
-          <a:p>
-            <a:pPr algn="l">
-              <a:spcBef>
-                <a:spcPts val="0"/>
-              </a:spcBef>
-              <a:spcAft>
-                <a:spcPts val="100"/>
-              </a:spcAft>
-            </a:pPr>
-            <a:r>
-              <a:rPr sz="1000" b="0" i="0">
-                <a:solidFill>
-                  <a:srgbClr val="2B2B2B"/>
-                </a:solidFill>
-                <a:latin typeface="Arial"/>
-              </a:rPr>
-              <a:t>→ Ces infrastructures discrètes sont le moteur de notre monde numérique, hébergeant nos données et applications. Cependant, leur fonctionnement est incroyablement gourmand en ressources, notamment pour le refroidissement des serveurs et le maintien d'une température stable.</a:t>
-            </a:r>
-          </a:p>
-          <a:p>
-            <a:pPr algn="l">
-              <a:spcBef>
-                <a:spcPts val="0"/>
-              </a:spcBef>
-              <a:spcAft>
-                <a:spcPts val="100"/>
-              </a:spcAft>
-            </a:pPr>
-            <a:r>
-              <a:rPr sz="1000" b="0" i="0">
-                <a:solidFill>
-                  <a:srgbClr val="2B2B2B"/>
-                </a:solidFill>
-                <a:latin typeface="Arial"/>
-              </a:rPr>
-              <a:t>→ d'eau par kWh</a:t>
-            </a:r>
-          </a:p>
-          <a:p>
-            <a:pPr algn="l">
-              <a:spcBef>
-                <a:spcPts val="0"/>
-              </a:spcBef>
-              <a:spcAft>
-                <a:spcPts val="100"/>
-              </a:spcAft>
-            </a:pPr>
-            <a:r>
-              <a:rPr sz="1000" b="0" i="0">
-                <a:solidFill>
-                  <a:srgbClr val="2B2B2B"/>
-                </a:solidFill>
-                <a:latin typeface="Arial"/>
-              </a:rPr>
-              <a:t>→ Pour chaque kilowatt-heure d'électricité consommée par un data center, entre 1 et 3 litres d'eau sont utilisés pour le refroidissement des serveurs. Une consommation équivalente à une douche de 5 minutes toutes les 30 secondes pour un centre moyen.</a:t>
-            </a:r>
-          </a:p>
-          <a:p>
-            <a:pPr algn="l">
-              <a:spcBef>
-                <a:spcPts val="0"/>
-              </a:spcBef>
-              <a:spcAft>
-                <a:spcPts val="100"/>
-              </a:spcAft>
-            </a:pPr>
-            <a:r>
-              <a:rPr sz="1000" b="0" i="0">
-                <a:solidFill>
-                  <a:srgbClr val="2B2B2B"/>
-                </a:solidFill>
-                <a:latin typeface="Arial"/>
-              </a:rPr>
-              <a:t>→ de l'électricité mondiale</a:t>
-            </a:r>
-          </a:p>
-        </p:txBody>
-      </p:sp>
-      <p:sp>
-        <p:nvSpPr>
-          <p:cNvPr id="27" name="Rectangle 26"/>
           <p:cNvSpPr/>
           <p:nvPr/>
         </p:nvSpPr>
@@ -4427,7 +4121,7 @@
       </p:sp>
       <p:sp>
         <p:nvSpPr>
-          <p:cNvPr id="28" name="TextBox 27"/>
+          <p:cNvPr id="22" name="TextBox 21"/>
           <p:cNvSpPr txBox="1"/>
           <p:nvPr/>
         </p:nvSpPr>
@@ -4462,7 +4156,7 @@
                 </a:solidFill>
                 <a:latin typeface="Arial"/>
               </a:rPr>
-              <a:t>→ Suite en page 2 : La montagne de déchets électroniques | L'obsolescence : le piège du renouvellement | Allonger la vie de ses appareils</a:t>
+              <a:t>→ Suite en page 2 : Les data centers : des usines énergivores | La montagne de déchets électroniques | L'obsolescence : le piège du renouvellement</a:t>
             </a:r>
           </a:p>
           <a:p>
@@ -4488,7 +4182,7 @@
       </p:sp>
       <p:sp>
         <p:nvSpPr>
-          <p:cNvPr id="29" name="TextBox 28"/>
+          <p:cNvPr id="23" name="TextBox 22"/>
           <p:cNvSpPr txBox="1"/>
           <p:nvPr/>
         </p:nvSpPr>
@@ -4624,7 +4318,313 @@
         <p:spPr>
           <a:xfrm>
             <a:off x="532800" y="1749600"/>
-            <a:ext cx="6490800" cy="1371600"/>
+            <a:ext cx="6490800" cy="2138400"/>
+          </a:xfrm>
+          <a:prstGeom prst="rect">
+            <a:avLst/>
+          </a:prstGeom>
+          <a:solidFill>
+            <a:srgbClr val="EBF7F6"/>
+          </a:solidFill>
+          <a:ln>
+            <a:noFill/>
+          </a:ln>
+        </p:spPr>
+        <p:style>
+          <a:lnRef idx="1">
+            <a:schemeClr val="accent1"/>
+          </a:lnRef>
+          <a:fillRef idx="3">
+            <a:schemeClr val="accent1"/>
+          </a:fillRef>
+          <a:effectRef idx="2">
+            <a:schemeClr val="accent1"/>
+          </a:effectRef>
+          <a:fontRef idx="minor">
+            <a:schemeClr val="lt1"/>
+          </a:fontRef>
+        </p:style>
+        <p:txBody>
+          <a:bodyPr rtlCol="0" anchor="ctr"/>
+          <a:lstStyle/>
+          <a:p/>
+        </p:txBody>
+      </p:sp>
+      <p:sp>
+        <p:nvSpPr>
+          <p:cNvPr id="4" name="Rectangle 3"/>
+          <p:cNvSpPr/>
+          <p:nvPr/>
+        </p:nvSpPr>
+        <p:spPr>
+          <a:xfrm>
+            <a:off x="532800" y="1749600"/>
+            <a:ext cx="572400" cy="2138400"/>
+          </a:xfrm>
+          <a:prstGeom prst="rect">
+            <a:avLst/>
+          </a:prstGeom>
+          <a:solidFill>
+            <a:srgbClr val="187C88"/>
+          </a:solidFill>
+          <a:ln>
+            <a:noFill/>
+          </a:ln>
+        </p:spPr>
+        <p:style>
+          <a:lnRef idx="1">
+            <a:schemeClr val="accent1"/>
+          </a:lnRef>
+          <a:fillRef idx="3">
+            <a:schemeClr val="accent1"/>
+          </a:fillRef>
+          <a:effectRef idx="2">
+            <a:schemeClr val="accent1"/>
+          </a:effectRef>
+          <a:fontRef idx="minor">
+            <a:schemeClr val="lt1"/>
+          </a:fontRef>
+        </p:style>
+        <p:txBody>
+          <a:bodyPr rtlCol="0" anchor="ctr"/>
+          <a:lstStyle/>
+          <a:p/>
+        </p:txBody>
+      </p:sp>
+      <p:sp>
+        <p:nvSpPr>
+          <p:cNvPr id="5" name="Rectangle 4"/>
+          <p:cNvSpPr/>
+          <p:nvPr/>
+        </p:nvSpPr>
+        <p:spPr>
+          <a:xfrm>
+            <a:off x="1206000" y="2170800"/>
+            <a:ext cx="5752800" cy="7200"/>
+          </a:xfrm>
+          <a:prstGeom prst="rect">
+            <a:avLst/>
+          </a:prstGeom>
+          <a:solidFill>
+            <a:srgbClr val="DDDDDD"/>
+          </a:solidFill>
+          <a:ln>
+            <a:noFill/>
+          </a:ln>
+        </p:spPr>
+        <p:style>
+          <a:lnRef idx="1">
+            <a:schemeClr val="accent1"/>
+          </a:lnRef>
+          <a:fillRef idx="3">
+            <a:schemeClr val="accent1"/>
+          </a:fillRef>
+          <a:effectRef idx="2">
+            <a:schemeClr val="accent1"/>
+          </a:effectRef>
+          <a:fontRef idx="minor">
+            <a:schemeClr val="lt1"/>
+          </a:fontRef>
+        </p:style>
+        <p:txBody>
+          <a:bodyPr rtlCol="0" anchor="ctr"/>
+          <a:lstStyle/>
+          <a:p/>
+        </p:txBody>
+      </p:sp>
+      <p:sp>
+        <p:nvSpPr>
+          <p:cNvPr id="6" name="TextBox 5"/>
+          <p:cNvSpPr txBox="1"/>
+          <p:nvPr/>
+        </p:nvSpPr>
+        <p:spPr>
+          <a:xfrm>
+            <a:off x="532800" y="1816200"/>
+            <a:ext cx="572400" cy="288000"/>
+          </a:xfrm>
+          <a:prstGeom prst="rect">
+            <a:avLst/>
+          </a:prstGeom>
+          <a:noFill/>
+        </p:spPr>
+        <p:txBody>
+          <a:bodyPr wrap="square" tIns="0" bIns="0" lIns="18000" rIns="18000">
+            <a:spAutoFit/>
+          </a:bodyPr>
+          <a:lstStyle/>
+          <a:p>
+            <a:pPr algn="ctr">
+              <a:spcBef>
+                <a:spcPts val="0"/>
+              </a:spcBef>
+              <a:spcAft>
+                <a:spcPts val="100"/>
+              </a:spcAft>
+            </a:pPr>
+            <a:r>
+              <a:rPr sz="2200" b="1" i="0">
+                <a:solidFill>
+                  <a:srgbClr val="FFFFFF"/>
+                </a:solidFill>
+                <a:latin typeface="Arial"/>
+              </a:rPr>
+              <a:t>4</a:t>
+            </a:r>
+          </a:p>
+        </p:txBody>
+      </p:sp>
+      <p:sp>
+        <p:nvSpPr>
+          <p:cNvPr id="7" name="TextBox 6"/>
+          <p:cNvSpPr txBox="1"/>
+          <p:nvPr/>
+        </p:nvSpPr>
+        <p:spPr>
+          <a:xfrm>
+            <a:off x="1177200" y="1785600"/>
+            <a:ext cx="5810400" cy="370799"/>
+          </a:xfrm>
+          <a:prstGeom prst="rect">
+            <a:avLst/>
+          </a:prstGeom>
+          <a:noFill/>
+        </p:spPr>
+        <p:txBody>
+          <a:bodyPr wrap="square" tIns="0" bIns="0" lIns="18000" rIns="18000">
+            <a:spAutoFit/>
+          </a:bodyPr>
+          <a:lstStyle/>
+          <a:p>
+            <a:pPr algn="l">
+              <a:spcBef>
+                <a:spcPts val="0"/>
+              </a:spcBef>
+              <a:spcAft>
+                <a:spcPts val="100"/>
+              </a:spcAft>
+            </a:pPr>
+            <a:r>
+              <a:rPr sz="1100" b="1" i="0">
+                <a:solidFill>
+                  <a:srgbClr val="187C88"/>
+                </a:solidFill>
+                <a:latin typeface="Arial"/>
+              </a:rPr>
+              <a:t>Les data centers : des usines énergivores</a:t>
+            </a:r>
+          </a:p>
+        </p:txBody>
+      </p:sp>
+      <p:sp>
+        <p:nvSpPr>
+          <p:cNvPr id="8" name="TextBox 7"/>
+          <p:cNvSpPr txBox="1"/>
+          <p:nvPr/>
+        </p:nvSpPr>
+        <p:spPr>
+          <a:xfrm>
+            <a:off x="1159200" y="2214000"/>
+            <a:ext cx="5828400" cy="1638000"/>
+          </a:xfrm>
+          <a:prstGeom prst="rect">
+            <a:avLst/>
+          </a:prstGeom>
+          <a:noFill/>
+        </p:spPr>
+        <p:txBody>
+          <a:bodyPr wrap="square" tIns="0" bIns="0" lIns="18000" rIns="18000">
+            <a:spAutoFit/>
+          </a:bodyPr>
+          <a:lstStyle/>
+          <a:p>
+            <a:pPr algn="l">
+              <a:spcBef>
+                <a:spcPts val="0"/>
+              </a:spcBef>
+              <a:spcAft>
+                <a:spcPts val="100"/>
+              </a:spcAft>
+            </a:pPr>
+            <a:r>
+              <a:rPr sz="1000" b="0" i="0">
+                <a:solidFill>
+                  <a:srgbClr val="2B2B2B"/>
+                </a:solidFill>
+                <a:latin typeface="Arial"/>
+              </a:rPr>
+              <a:t>→ Ces infrastructures discrètes sont le moteur de notre monde numérique, hébergeant nos données et applications. Cependant, leur fonctionnement est incroyablement gourmand en ressources, notamment pour le refroidissement des serveurs et le maintien d'une température stable.</a:t>
+            </a:r>
+          </a:p>
+          <a:p>
+            <a:pPr algn="l">
+              <a:spcBef>
+                <a:spcPts val="0"/>
+              </a:spcBef>
+              <a:spcAft>
+                <a:spcPts val="100"/>
+              </a:spcAft>
+            </a:pPr>
+            <a:r>
+              <a:rPr sz="1000" b="0" i="0">
+                <a:solidFill>
+                  <a:srgbClr val="2B2B2B"/>
+                </a:solidFill>
+                <a:latin typeface="Arial"/>
+              </a:rPr>
+              <a:t>→ d'eau par kWh</a:t>
+            </a:r>
+          </a:p>
+          <a:p>
+            <a:pPr algn="l">
+              <a:spcBef>
+                <a:spcPts val="0"/>
+              </a:spcBef>
+              <a:spcAft>
+                <a:spcPts val="100"/>
+              </a:spcAft>
+            </a:pPr>
+            <a:r>
+              <a:rPr sz="1000" b="0" i="0">
+                <a:solidFill>
+                  <a:srgbClr val="2B2B2B"/>
+                </a:solidFill>
+                <a:latin typeface="Arial"/>
+              </a:rPr>
+              <a:t>→ Pour chaque kilowatt-heure d'électricité consommée par un data center, entre 1 et 3 litres d'eau sont utilisés pour le refroidissement des serveurs. Une consommation équivalente à une douche de 5 minutes toutes les 30 secondes pour un centre moyen.</a:t>
+            </a:r>
+          </a:p>
+          <a:p>
+            <a:pPr algn="l">
+              <a:spcBef>
+                <a:spcPts val="0"/>
+              </a:spcBef>
+              <a:spcAft>
+                <a:spcPts val="100"/>
+              </a:spcAft>
+            </a:pPr>
+            <a:r>
+              <a:rPr sz="1000" b="0" i="0">
+                <a:solidFill>
+                  <a:srgbClr val="2B2B2B"/>
+                </a:solidFill>
+                <a:latin typeface="Arial"/>
+              </a:rPr>
+              <a:t>→ de l'électricité mondiale</a:t>
+            </a:r>
+          </a:p>
+        </p:txBody>
+      </p:sp>
+      <p:sp>
+        <p:nvSpPr>
+          <p:cNvPr id="9" name="Rectangle 8"/>
+          <p:cNvSpPr/>
+          <p:nvPr/>
+        </p:nvSpPr>
+        <p:spPr>
+          <a:xfrm>
+            <a:off x="532800" y="3952800"/>
+            <a:ext cx="6490800" cy="1684800"/>
           </a:xfrm>
           <a:prstGeom prst="rect">
             <a:avLst/>
@@ -4658,14 +4658,14 @@
       </p:sp>
       <p:sp>
         <p:nvSpPr>
-          <p:cNvPr id="4" name="Rectangle 3"/>
+          <p:cNvPr id="10" name="Rectangle 9"/>
           <p:cNvSpPr/>
           <p:nvPr/>
         </p:nvSpPr>
         <p:spPr>
           <a:xfrm>
-            <a:off x="532800" y="1749600"/>
-            <a:ext cx="572400" cy="1371600"/>
+            <a:off x="532800" y="3952800"/>
+            <a:ext cx="572400" cy="1684800"/>
           </a:xfrm>
           <a:prstGeom prst="rect">
             <a:avLst/>
@@ -4699,13 +4699,13 @@
       </p:sp>
       <p:sp>
         <p:nvSpPr>
-          <p:cNvPr id="5" name="Rectangle 4"/>
+          <p:cNvPr id="11" name="Rectangle 10"/>
           <p:cNvSpPr/>
           <p:nvPr/>
         </p:nvSpPr>
         <p:spPr>
           <a:xfrm>
-            <a:off x="1206000" y="2170800"/>
+            <a:off x="1206000" y="4374000"/>
             <a:ext cx="5752800" cy="7200"/>
           </a:xfrm>
           <a:prstGeom prst="rect">
@@ -4740,13 +4740,13 @@
       </p:sp>
       <p:sp>
         <p:nvSpPr>
-          <p:cNvPr id="6" name="TextBox 5"/>
+          <p:cNvPr id="12" name="TextBox 11"/>
           <p:cNvSpPr txBox="1"/>
           <p:nvPr/>
         </p:nvSpPr>
         <p:spPr>
           <a:xfrm>
-            <a:off x="532800" y="1816200"/>
+            <a:off x="532800" y="4019400"/>
             <a:ext cx="572400" cy="288000"/>
           </a:xfrm>
           <a:prstGeom prst="rect">
@@ -4782,13 +4782,13 @@
       </p:sp>
       <p:sp>
         <p:nvSpPr>
-          <p:cNvPr id="7" name="TextBox 6"/>
+          <p:cNvPr id="13" name="TextBox 12"/>
           <p:cNvSpPr txBox="1"/>
           <p:nvPr/>
         </p:nvSpPr>
         <p:spPr>
           <a:xfrm>
-            <a:off x="1177200" y="1785600"/>
+            <a:off x="1177200" y="3988800"/>
             <a:ext cx="5810400" cy="370799"/>
           </a:xfrm>
           <a:prstGeom prst="rect">
@@ -4824,14 +4824,14 @@
       </p:sp>
       <p:sp>
         <p:nvSpPr>
-          <p:cNvPr id="8" name="TextBox 7"/>
+          <p:cNvPr id="14" name="TextBox 13"/>
           <p:cNvSpPr txBox="1"/>
           <p:nvPr/>
         </p:nvSpPr>
         <p:spPr>
           <a:xfrm>
-            <a:off x="1159200" y="2214000"/>
-            <a:ext cx="5828400" cy="885600"/>
+            <a:off x="1159200" y="4417200"/>
+            <a:ext cx="5828400" cy="1184399"/>
           </a:xfrm>
           <a:prstGeom prst="rect">
             <a:avLst/>
@@ -4923,14 +4923,14 @@
       </p:sp>
       <p:sp>
         <p:nvSpPr>
-          <p:cNvPr id="9" name="Rectangle 8"/>
+          <p:cNvPr id="15" name="Rectangle 14"/>
           <p:cNvSpPr/>
           <p:nvPr/>
         </p:nvSpPr>
         <p:spPr>
           <a:xfrm>
-            <a:off x="532800" y="3186000"/>
-            <a:ext cx="6490800" cy="1371600"/>
+            <a:off x="532800" y="5702400"/>
+            <a:ext cx="6490800" cy="1835999"/>
           </a:xfrm>
           <a:prstGeom prst="rect">
             <a:avLst/>
@@ -4964,14 +4964,14 @@
       </p:sp>
       <p:sp>
         <p:nvSpPr>
-          <p:cNvPr id="10" name="Rectangle 9"/>
+          <p:cNvPr id="16" name="Rectangle 15"/>
           <p:cNvSpPr/>
           <p:nvPr/>
         </p:nvSpPr>
         <p:spPr>
           <a:xfrm>
-            <a:off x="532800" y="3186000"/>
-            <a:ext cx="572400" cy="1371600"/>
+            <a:off x="532800" y="5702400"/>
+            <a:ext cx="572400" cy="1835999"/>
           </a:xfrm>
           <a:prstGeom prst="rect">
             <a:avLst/>
@@ -5005,13 +5005,13 @@
       </p:sp>
       <p:sp>
         <p:nvSpPr>
-          <p:cNvPr id="11" name="Rectangle 10"/>
+          <p:cNvPr id="17" name="Rectangle 16"/>
           <p:cNvSpPr/>
           <p:nvPr/>
         </p:nvSpPr>
         <p:spPr>
           <a:xfrm>
-            <a:off x="1206000" y="3607200"/>
+            <a:off x="1206000" y="6123599"/>
             <a:ext cx="5752800" cy="7200"/>
           </a:xfrm>
           <a:prstGeom prst="rect">
@@ -5046,13 +5046,13 @@
       </p:sp>
       <p:sp>
         <p:nvSpPr>
-          <p:cNvPr id="12" name="TextBox 11"/>
+          <p:cNvPr id="18" name="TextBox 17"/>
           <p:cNvSpPr txBox="1"/>
           <p:nvPr/>
         </p:nvSpPr>
         <p:spPr>
           <a:xfrm>
-            <a:off x="532800" y="3252600"/>
+            <a:off x="532800" y="5768999"/>
             <a:ext cx="572400" cy="288000"/>
           </a:xfrm>
           <a:prstGeom prst="rect">
@@ -5088,13 +5088,13 @@
       </p:sp>
       <p:sp>
         <p:nvSpPr>
-          <p:cNvPr id="13" name="TextBox 12"/>
+          <p:cNvPr id="19" name="TextBox 18"/>
           <p:cNvSpPr txBox="1"/>
           <p:nvPr/>
         </p:nvSpPr>
         <p:spPr>
           <a:xfrm>
-            <a:off x="1177200" y="3221999"/>
+            <a:off x="1177200" y="5738400"/>
             <a:ext cx="5810400" cy="370799"/>
           </a:xfrm>
           <a:prstGeom prst="rect">
@@ -5130,14 +5130,14 @@
       </p:sp>
       <p:sp>
         <p:nvSpPr>
-          <p:cNvPr id="14" name="TextBox 13"/>
+          <p:cNvPr id="20" name="TextBox 19"/>
           <p:cNvSpPr txBox="1"/>
           <p:nvPr/>
         </p:nvSpPr>
         <p:spPr>
           <a:xfrm>
-            <a:off x="1159200" y="3650399"/>
-            <a:ext cx="5828400" cy="885600"/>
+            <a:off x="1159200" y="6166800"/>
+            <a:ext cx="5828400" cy="1335599"/>
           </a:xfrm>
           <a:prstGeom prst="rect">
             <a:avLst/>
@@ -5229,14 +5229,14 @@
       </p:sp>
       <p:sp>
         <p:nvSpPr>
-          <p:cNvPr id="15" name="Rectangle 14"/>
+          <p:cNvPr id="21" name="Rectangle 20"/>
           <p:cNvSpPr/>
           <p:nvPr/>
         </p:nvSpPr>
         <p:spPr>
           <a:xfrm>
-            <a:off x="532800" y="4622400"/>
-            <a:ext cx="6490800" cy="1371600"/>
+            <a:off x="532800" y="7603199"/>
+            <a:ext cx="6490800" cy="1835999"/>
           </a:xfrm>
           <a:prstGeom prst="rect">
             <a:avLst/>
@@ -5270,14 +5270,14 @@
       </p:sp>
       <p:sp>
         <p:nvSpPr>
-          <p:cNvPr id="16" name="Rectangle 15"/>
+          <p:cNvPr id="22" name="Rectangle 21"/>
           <p:cNvSpPr/>
           <p:nvPr/>
         </p:nvSpPr>
         <p:spPr>
           <a:xfrm>
-            <a:off x="532800" y="4622400"/>
-            <a:ext cx="572400" cy="1371600"/>
+            <a:off x="532800" y="7603199"/>
+            <a:ext cx="572400" cy="1835999"/>
           </a:xfrm>
           <a:prstGeom prst="rect">
             <a:avLst/>
@@ -5311,13 +5311,13 @@
       </p:sp>
       <p:sp>
         <p:nvSpPr>
-          <p:cNvPr id="17" name="Rectangle 16"/>
+          <p:cNvPr id="23" name="Rectangle 22"/>
           <p:cNvSpPr/>
           <p:nvPr/>
         </p:nvSpPr>
         <p:spPr>
           <a:xfrm>
-            <a:off x="1206000" y="5043600"/>
+            <a:off x="1206000" y="8024400"/>
             <a:ext cx="5752800" cy="7200"/>
           </a:xfrm>
           <a:prstGeom prst="rect">
@@ -5352,13 +5352,13 @@
       </p:sp>
       <p:sp>
         <p:nvSpPr>
-          <p:cNvPr id="18" name="TextBox 17"/>
+          <p:cNvPr id="24" name="TextBox 23"/>
           <p:cNvSpPr txBox="1"/>
           <p:nvPr/>
         </p:nvSpPr>
         <p:spPr>
           <a:xfrm>
-            <a:off x="532800" y="4689000"/>
+            <a:off x="532800" y="7669799"/>
             <a:ext cx="572400" cy="288000"/>
           </a:xfrm>
           <a:prstGeom prst="rect">
@@ -5394,13 +5394,13 @@
       </p:sp>
       <p:sp>
         <p:nvSpPr>
-          <p:cNvPr id="19" name="TextBox 18"/>
+          <p:cNvPr id="25" name="TextBox 24"/>
           <p:cNvSpPr txBox="1"/>
           <p:nvPr/>
         </p:nvSpPr>
         <p:spPr>
           <a:xfrm>
-            <a:off x="1177200" y="4658400"/>
+            <a:off x="1177200" y="7639200"/>
             <a:ext cx="5810400" cy="370799"/>
           </a:xfrm>
           <a:prstGeom prst="rect">
@@ -5436,14 +5436,14 @@
       </p:sp>
       <p:sp>
         <p:nvSpPr>
-          <p:cNvPr id="20" name="TextBox 19"/>
+          <p:cNvPr id="26" name="TextBox 25"/>
           <p:cNvSpPr txBox="1"/>
           <p:nvPr/>
         </p:nvSpPr>
         <p:spPr>
           <a:xfrm>
-            <a:off x="1159200" y="5086800"/>
-            <a:ext cx="5828400" cy="885600"/>
+            <a:off x="1159200" y="8067600"/>
+            <a:ext cx="5828400" cy="1335599"/>
           </a:xfrm>
           <a:prstGeom prst="rect">
             <a:avLst/>
@@ -5535,13 +5535,13 @@
       </p:sp>
       <p:sp>
         <p:nvSpPr>
-          <p:cNvPr id="21" name="Rectangle 20"/>
+          <p:cNvPr id="27" name="Rectangle 26"/>
           <p:cNvSpPr/>
           <p:nvPr/>
         </p:nvSpPr>
         <p:spPr>
           <a:xfrm>
-            <a:off x="532800" y="6166800"/>
+            <a:off x="532800" y="9612000"/>
             <a:ext cx="6490800" cy="1263600"/>
           </a:xfrm>
           <a:prstGeom prst="rect">
@@ -5578,13 +5578,13 @@
       </p:sp>
       <p:sp>
         <p:nvSpPr>
-          <p:cNvPr id="22" name="Rectangle 21"/>
+          <p:cNvPr id="28" name="Rectangle 27"/>
           <p:cNvSpPr/>
           <p:nvPr/>
         </p:nvSpPr>
         <p:spPr>
           <a:xfrm>
-            <a:off x="698400" y="6422400"/>
+            <a:off x="698400" y="9867600"/>
             <a:ext cx="6159600" cy="7200"/>
           </a:xfrm>
           <a:prstGeom prst="rect">
@@ -5619,13 +5619,13 @@
       </p:sp>
       <p:sp>
         <p:nvSpPr>
-          <p:cNvPr id="23" name="TextBox 22"/>
+          <p:cNvPr id="29" name="TextBox 28"/>
           <p:cNvSpPr txBox="1"/>
           <p:nvPr/>
         </p:nvSpPr>
         <p:spPr>
           <a:xfrm>
-            <a:off x="676800" y="6195599"/>
+            <a:off x="676800" y="9640800"/>
             <a:ext cx="6292800" cy="234000"/>
           </a:xfrm>
           <a:prstGeom prst="rect">
@@ -5661,13 +5661,13 @@
       </p:sp>
       <p:sp>
         <p:nvSpPr>
-          <p:cNvPr id="24" name="TextBox 23"/>
+          <p:cNvPr id="30" name="TextBox 29"/>
           <p:cNvSpPr txBox="1"/>
           <p:nvPr/>
         </p:nvSpPr>
         <p:spPr>
           <a:xfrm>
-            <a:off x="676800" y="6447600"/>
+            <a:off x="676800" y="9892800"/>
             <a:ext cx="6292800" cy="946800"/>
           </a:xfrm>
           <a:prstGeom prst="rect">
@@ -5760,13 +5760,13 @@
       </p:sp>
       <p:sp>
         <p:nvSpPr>
-          <p:cNvPr id="25" name="Rectangle 24"/>
+          <p:cNvPr id="31" name="Rectangle 30"/>
           <p:cNvSpPr/>
           <p:nvPr/>
         </p:nvSpPr>
         <p:spPr>
           <a:xfrm>
-            <a:off x="532800" y="7495200"/>
+            <a:off x="532800" y="10940400"/>
             <a:ext cx="6490800" cy="1263600"/>
           </a:xfrm>
           <a:prstGeom prst="rect">
@@ -5803,13 +5803,13 @@
       </p:sp>
       <p:sp>
         <p:nvSpPr>
-          <p:cNvPr id="26" name="Rectangle 25"/>
+          <p:cNvPr id="32" name="Rectangle 31"/>
           <p:cNvSpPr/>
           <p:nvPr/>
         </p:nvSpPr>
         <p:spPr>
           <a:xfrm>
-            <a:off x="698400" y="7750800"/>
+            <a:off x="698400" y="11196000"/>
             <a:ext cx="6159600" cy="7200"/>
           </a:xfrm>
           <a:prstGeom prst="rect">
@@ -5844,13 +5844,13 @@
       </p:sp>
       <p:sp>
         <p:nvSpPr>
-          <p:cNvPr id="27" name="TextBox 26"/>
+          <p:cNvPr id="33" name="TextBox 32"/>
           <p:cNvSpPr txBox="1"/>
           <p:nvPr/>
         </p:nvSpPr>
         <p:spPr>
           <a:xfrm>
-            <a:off x="676800" y="7523999"/>
+            <a:off x="676800" y="10969200"/>
             <a:ext cx="6292800" cy="234000"/>
           </a:xfrm>
           <a:prstGeom prst="rect">
@@ -5886,13 +5886,13 @@
       </p:sp>
       <p:sp>
         <p:nvSpPr>
-          <p:cNvPr id="28" name="TextBox 27"/>
+          <p:cNvPr id="34" name="TextBox 33"/>
           <p:cNvSpPr txBox="1"/>
           <p:nvPr/>
         </p:nvSpPr>
         <p:spPr>
           <a:xfrm>
-            <a:off x="676800" y="7776000"/>
+            <a:off x="676800" y="11221200"/>
             <a:ext cx="6292800" cy="946800"/>
           </a:xfrm>
           <a:prstGeom prst="rect">
@@ -5985,13 +5985,13 @@
       </p:sp>
       <p:sp>
         <p:nvSpPr>
-          <p:cNvPr id="29" name="Rectangle 28"/>
+          <p:cNvPr id="35" name="Rectangle 34"/>
           <p:cNvSpPr/>
           <p:nvPr/>
         </p:nvSpPr>
         <p:spPr>
           <a:xfrm>
-            <a:off x="532800" y="8823600"/>
+            <a:off x="532800" y="12268800"/>
             <a:ext cx="6490800" cy="1263600"/>
           </a:xfrm>
           <a:prstGeom prst="rect">
@@ -6028,13 +6028,13 @@
       </p:sp>
       <p:sp>
         <p:nvSpPr>
-          <p:cNvPr id="30" name="Rectangle 29"/>
+          <p:cNvPr id="36" name="Rectangle 35"/>
           <p:cNvSpPr/>
           <p:nvPr/>
         </p:nvSpPr>
         <p:spPr>
           <a:xfrm>
-            <a:off x="698400" y="9079200"/>
+            <a:off x="698400" y="12524400"/>
             <a:ext cx="6159600" cy="7200"/>
           </a:xfrm>
           <a:prstGeom prst="rect">
@@ -6069,13 +6069,13 @@
       </p:sp>
       <p:sp>
         <p:nvSpPr>
-          <p:cNvPr id="31" name="TextBox 30"/>
+          <p:cNvPr id="37" name="TextBox 36"/>
           <p:cNvSpPr txBox="1"/>
           <p:nvPr/>
         </p:nvSpPr>
         <p:spPr>
           <a:xfrm>
-            <a:off x="676800" y="8852399"/>
+            <a:off x="676800" y="12297599"/>
             <a:ext cx="6292800" cy="234000"/>
           </a:xfrm>
           <a:prstGeom prst="rect">
@@ -6111,13 +6111,13 @@
       </p:sp>
       <p:sp>
         <p:nvSpPr>
-          <p:cNvPr id="32" name="TextBox 31"/>
+          <p:cNvPr id="38" name="TextBox 37"/>
           <p:cNvSpPr txBox="1"/>
           <p:nvPr/>
         </p:nvSpPr>
         <p:spPr>
           <a:xfrm>
-            <a:off x="676800" y="9104400"/>
+            <a:off x="676800" y="12549600"/>
             <a:ext cx="6292800" cy="946800"/>
           </a:xfrm>
           <a:prstGeom prst="rect">
@@ -6210,13 +6210,13 @@
       </p:sp>
       <p:sp>
         <p:nvSpPr>
-          <p:cNvPr id="33" name="Rectangle 32"/>
+          <p:cNvPr id="39" name="Rectangle 38"/>
           <p:cNvSpPr/>
           <p:nvPr/>
         </p:nvSpPr>
         <p:spPr>
           <a:xfrm>
-            <a:off x="532800" y="10259999"/>
+            <a:off x="532800" y="13705199"/>
             <a:ext cx="6490800" cy="1512000"/>
           </a:xfrm>
           <a:prstGeom prst="rect">
@@ -6253,13 +6253,13 @@
       </p:sp>
       <p:sp>
         <p:nvSpPr>
-          <p:cNvPr id="34" name="Rectangle 33"/>
+          <p:cNvPr id="40" name="Rectangle 39"/>
           <p:cNvSpPr/>
           <p:nvPr/>
         </p:nvSpPr>
         <p:spPr>
           <a:xfrm>
-            <a:off x="2221200" y="10846799"/>
+            <a:off x="2221200" y="14291999"/>
             <a:ext cx="3110400" cy="7200"/>
           </a:xfrm>
           <a:prstGeom prst="rect">
@@ -6294,13 +6294,13 @@
       </p:sp>
       <p:sp>
         <p:nvSpPr>
-          <p:cNvPr id="35" name="TextBox 34"/>
+          <p:cNvPr id="41" name="TextBox 40"/>
           <p:cNvSpPr txBox="1"/>
           <p:nvPr/>
         </p:nvSpPr>
         <p:spPr>
           <a:xfrm>
-            <a:off x="1792800" y="10324799"/>
+            <a:off x="1792800" y="13769999"/>
             <a:ext cx="4140000" cy="1404000"/>
           </a:xfrm>
           <a:prstGeom prst="rect">
@@ -6412,7 +6412,7 @@
       </p:sp>
       <p:sp>
         <p:nvSpPr>
-          <p:cNvPr id="36" name="TextBox 35"/>
+          <p:cNvPr id="42" name="TextBox 41"/>
           <p:cNvSpPr txBox="1"/>
           <p:nvPr/>
         </p:nvSpPr>

--- a/assets/memos/E6-memo.pptx
+++ b/assets/memos/E6-memo.pptx
@@ -3097,9 +3097,35 @@
         <p:nvPr/>
       </p:nvGrpSpPr>
       <p:grpSpPr/>
-      <p:sp>
-        <p:nvSpPr>
-          <p:cNvPr id="2" name="TextBox 1"/>
+      <p:pic>
+        <p:nvPicPr>
+          <p:cNvPr id="2" name="Picture 1" descr="bg-p1.png"/>
+          <p:cNvPicPr>
+            <a:picLocks noChangeAspect="1"/>
+          </p:cNvPicPr>
+          <p:nvPr/>
+        </p:nvPicPr>
+        <p:blipFill>
+          <a:blip r:embed="rId2">
+            <a:alphaModFix amt="80000"/>
+          </a:blip>
+          <a:stretch>
+            <a:fillRect/>
+          </a:stretch>
+        </p:blipFill>
+        <p:spPr>
+          <a:xfrm>
+            <a:off x="0" y="0"/>
+            <a:ext cx="7556399" cy="10692000"/>
+          </a:xfrm>
+          <a:prstGeom prst="rect">
+            <a:avLst/>
+          </a:prstGeom>
+        </p:spPr>
+      </p:pic>
+      <p:sp>
+        <p:nvSpPr>
+          <p:cNvPr id="3" name="TextBox 2"/>
           <p:cNvSpPr txBox="1"/>
           <p:nvPr/>
         </p:nvSpPr>
@@ -3160,7 +3186,7 @@
       </p:sp>
       <p:sp>
         <p:nvSpPr>
-          <p:cNvPr id="3" name="Rectangle 2"/>
+          <p:cNvPr id="4" name="Rectangle 3"/>
           <p:cNvSpPr/>
           <p:nvPr/>
         </p:nvSpPr>
@@ -3201,7 +3227,7 @@
       </p:sp>
       <p:sp>
         <p:nvSpPr>
-          <p:cNvPr id="4" name="Rectangle 3"/>
+          <p:cNvPr id="5" name="Rectangle 4"/>
           <p:cNvSpPr/>
           <p:nvPr/>
         </p:nvSpPr>
@@ -3242,7 +3268,7 @@
       </p:sp>
       <p:sp>
         <p:nvSpPr>
-          <p:cNvPr id="5" name="Rectangle 4"/>
+          <p:cNvPr id="6" name="Rectangle 5"/>
           <p:cNvSpPr/>
           <p:nvPr/>
         </p:nvSpPr>
@@ -3283,7 +3309,7 @@
       </p:sp>
       <p:sp>
         <p:nvSpPr>
-          <p:cNvPr id="6" name="TextBox 5"/>
+          <p:cNvPr id="7" name="TextBox 6"/>
           <p:cNvSpPr txBox="1"/>
           <p:nvPr/>
         </p:nvSpPr>
@@ -3325,7 +3351,7 @@
       </p:sp>
       <p:sp>
         <p:nvSpPr>
-          <p:cNvPr id="7" name="TextBox 6"/>
+          <p:cNvPr id="8" name="TextBox 7"/>
           <p:cNvSpPr txBox="1"/>
           <p:nvPr/>
         </p:nvSpPr>
@@ -3367,7 +3393,7 @@
       </p:sp>
       <p:sp>
         <p:nvSpPr>
-          <p:cNvPr id="8" name="TextBox 7"/>
+          <p:cNvPr id="9" name="TextBox 8"/>
           <p:cNvSpPr txBox="1"/>
           <p:nvPr/>
         </p:nvSpPr>
@@ -3466,7 +3492,7 @@
       </p:sp>
       <p:sp>
         <p:nvSpPr>
-          <p:cNvPr id="9" name="Rectangle 8"/>
+          <p:cNvPr id="10" name="Rectangle 9"/>
           <p:cNvSpPr/>
           <p:nvPr/>
         </p:nvSpPr>
@@ -3507,7 +3533,7 @@
       </p:sp>
       <p:sp>
         <p:nvSpPr>
-          <p:cNvPr id="10" name="Rectangle 9"/>
+          <p:cNvPr id="11" name="Rectangle 10"/>
           <p:cNvSpPr/>
           <p:nvPr/>
         </p:nvSpPr>
@@ -3548,7 +3574,7 @@
       </p:sp>
       <p:sp>
         <p:nvSpPr>
-          <p:cNvPr id="11" name="Rectangle 10"/>
+          <p:cNvPr id="12" name="Rectangle 11"/>
           <p:cNvSpPr/>
           <p:nvPr/>
         </p:nvSpPr>
@@ -3589,7 +3615,7 @@
       </p:sp>
       <p:sp>
         <p:nvSpPr>
-          <p:cNvPr id="12" name="TextBox 11"/>
+          <p:cNvPr id="13" name="TextBox 12"/>
           <p:cNvSpPr txBox="1"/>
           <p:nvPr/>
         </p:nvSpPr>
@@ -3631,7 +3657,7 @@
       </p:sp>
       <p:sp>
         <p:nvSpPr>
-          <p:cNvPr id="13" name="TextBox 12"/>
+          <p:cNvPr id="14" name="TextBox 13"/>
           <p:cNvSpPr txBox="1"/>
           <p:nvPr/>
         </p:nvSpPr>
@@ -3673,7 +3699,7 @@
       </p:sp>
       <p:sp>
         <p:nvSpPr>
-          <p:cNvPr id="14" name="TextBox 13"/>
+          <p:cNvPr id="15" name="TextBox 14"/>
           <p:cNvSpPr txBox="1"/>
           <p:nvPr/>
         </p:nvSpPr>
@@ -3772,7 +3798,7 @@
       </p:sp>
       <p:sp>
         <p:nvSpPr>
-          <p:cNvPr id="15" name="Rectangle 14"/>
+          <p:cNvPr id="16" name="Rectangle 15"/>
           <p:cNvSpPr/>
           <p:nvPr/>
         </p:nvSpPr>
@@ -3813,7 +3839,7 @@
       </p:sp>
       <p:sp>
         <p:nvSpPr>
-          <p:cNvPr id="16" name="Rectangle 15"/>
+          <p:cNvPr id="17" name="Rectangle 16"/>
           <p:cNvSpPr/>
           <p:nvPr/>
         </p:nvSpPr>
@@ -3854,7 +3880,7 @@
       </p:sp>
       <p:sp>
         <p:nvSpPr>
-          <p:cNvPr id="17" name="Rectangle 16"/>
+          <p:cNvPr id="18" name="Rectangle 17"/>
           <p:cNvSpPr/>
           <p:nvPr/>
         </p:nvSpPr>
@@ -3895,7 +3921,7 @@
       </p:sp>
       <p:sp>
         <p:nvSpPr>
-          <p:cNvPr id="18" name="TextBox 17"/>
+          <p:cNvPr id="19" name="TextBox 18"/>
           <p:cNvSpPr txBox="1"/>
           <p:nvPr/>
         </p:nvSpPr>
@@ -3937,7 +3963,7 @@
       </p:sp>
       <p:sp>
         <p:nvSpPr>
-          <p:cNvPr id="19" name="TextBox 18"/>
+          <p:cNvPr id="20" name="TextBox 19"/>
           <p:cNvSpPr txBox="1"/>
           <p:nvPr/>
         </p:nvSpPr>
@@ -3979,7 +4005,7 @@
       </p:sp>
       <p:sp>
         <p:nvSpPr>
-          <p:cNvPr id="20" name="TextBox 19"/>
+          <p:cNvPr id="21" name="TextBox 20"/>
           <p:cNvSpPr txBox="1"/>
           <p:nvPr/>
         </p:nvSpPr>
@@ -4078,7 +4104,7 @@
       </p:sp>
       <p:sp>
         <p:nvSpPr>
-          <p:cNvPr id="21" name="Rectangle 20"/>
+          <p:cNvPr id="22" name="Rectangle 21"/>
           <p:cNvSpPr/>
           <p:nvPr/>
         </p:nvSpPr>
@@ -4121,7 +4147,7 @@
       </p:sp>
       <p:sp>
         <p:nvSpPr>
-          <p:cNvPr id="22" name="TextBox 21"/>
+          <p:cNvPr id="23" name="TextBox 22"/>
           <p:cNvSpPr txBox="1"/>
           <p:nvPr/>
         </p:nvSpPr>
@@ -4182,7 +4208,7 @@
       </p:sp>
       <p:sp>
         <p:nvSpPr>
-          <p:cNvPr id="23" name="TextBox 22"/>
+          <p:cNvPr id="24" name="TextBox 23"/>
           <p:cNvSpPr txBox="1"/>
           <p:nvPr/>
         </p:nvSpPr>
@@ -4248,9 +4274,35 @@
         <p:nvPr/>
       </p:nvGrpSpPr>
       <p:grpSpPr/>
-      <p:sp>
-        <p:nvSpPr>
-          <p:cNvPr id="2" name="TextBox 1"/>
+      <p:pic>
+        <p:nvPicPr>
+          <p:cNvPr id="2" name="Picture 1" descr="bg-p2.png"/>
+          <p:cNvPicPr>
+            <a:picLocks noChangeAspect="1"/>
+          </p:cNvPicPr>
+          <p:nvPr/>
+        </p:nvPicPr>
+        <p:blipFill>
+          <a:blip r:embed="rId2">
+            <a:alphaModFix amt="80000"/>
+          </a:blip>
+          <a:stretch>
+            <a:fillRect/>
+          </a:stretch>
+        </p:blipFill>
+        <p:spPr>
+          <a:xfrm>
+            <a:off x="0" y="0"/>
+            <a:ext cx="7556399" cy="10692000"/>
+          </a:xfrm>
+          <a:prstGeom prst="rect">
+            <a:avLst/>
+          </a:prstGeom>
+        </p:spPr>
+      </p:pic>
+      <p:sp>
+        <p:nvSpPr>
+          <p:cNvPr id="3" name="TextBox 2"/>
           <p:cNvSpPr txBox="1"/>
           <p:nvPr/>
         </p:nvSpPr>
@@ -4311,7 +4363,7 @@
       </p:sp>
       <p:sp>
         <p:nvSpPr>
-          <p:cNvPr id="3" name="Rectangle 2"/>
+          <p:cNvPr id="4" name="Rectangle 3"/>
           <p:cNvSpPr/>
           <p:nvPr/>
         </p:nvSpPr>
@@ -4352,7 +4404,7 @@
       </p:sp>
       <p:sp>
         <p:nvSpPr>
-          <p:cNvPr id="4" name="Rectangle 3"/>
+          <p:cNvPr id="5" name="Rectangle 4"/>
           <p:cNvSpPr/>
           <p:nvPr/>
         </p:nvSpPr>
@@ -4393,7 +4445,7 @@
       </p:sp>
       <p:sp>
         <p:nvSpPr>
-          <p:cNvPr id="5" name="Rectangle 4"/>
+          <p:cNvPr id="6" name="Rectangle 5"/>
           <p:cNvSpPr/>
           <p:nvPr/>
         </p:nvSpPr>
@@ -4434,7 +4486,7 @@
       </p:sp>
       <p:sp>
         <p:nvSpPr>
-          <p:cNvPr id="6" name="TextBox 5"/>
+          <p:cNvPr id="7" name="TextBox 6"/>
           <p:cNvSpPr txBox="1"/>
           <p:nvPr/>
         </p:nvSpPr>
@@ -4476,7 +4528,7 @@
       </p:sp>
       <p:sp>
         <p:nvSpPr>
-          <p:cNvPr id="7" name="TextBox 6"/>
+          <p:cNvPr id="8" name="TextBox 7"/>
           <p:cNvSpPr txBox="1"/>
           <p:nvPr/>
         </p:nvSpPr>
@@ -4518,7 +4570,7 @@
       </p:sp>
       <p:sp>
         <p:nvSpPr>
-          <p:cNvPr id="8" name="TextBox 7"/>
+          <p:cNvPr id="9" name="TextBox 8"/>
           <p:cNvSpPr txBox="1"/>
           <p:nvPr/>
         </p:nvSpPr>
@@ -4617,7 +4669,7 @@
       </p:sp>
       <p:sp>
         <p:nvSpPr>
-          <p:cNvPr id="9" name="Rectangle 8"/>
+          <p:cNvPr id="10" name="Rectangle 9"/>
           <p:cNvSpPr/>
           <p:nvPr/>
         </p:nvSpPr>
@@ -4658,7 +4710,7 @@
       </p:sp>
       <p:sp>
         <p:nvSpPr>
-          <p:cNvPr id="10" name="Rectangle 9"/>
+          <p:cNvPr id="11" name="Rectangle 10"/>
           <p:cNvSpPr/>
           <p:nvPr/>
         </p:nvSpPr>
@@ -4699,7 +4751,7 @@
       </p:sp>
       <p:sp>
         <p:nvSpPr>
-          <p:cNvPr id="11" name="Rectangle 10"/>
+          <p:cNvPr id="12" name="Rectangle 11"/>
           <p:cNvSpPr/>
           <p:nvPr/>
         </p:nvSpPr>
@@ -4740,7 +4792,7 @@
       </p:sp>
       <p:sp>
         <p:nvSpPr>
-          <p:cNvPr id="12" name="TextBox 11"/>
+          <p:cNvPr id="13" name="TextBox 12"/>
           <p:cNvSpPr txBox="1"/>
           <p:nvPr/>
         </p:nvSpPr>
@@ -4782,7 +4834,7 @@
       </p:sp>
       <p:sp>
         <p:nvSpPr>
-          <p:cNvPr id="13" name="TextBox 12"/>
+          <p:cNvPr id="14" name="TextBox 13"/>
           <p:cNvSpPr txBox="1"/>
           <p:nvPr/>
         </p:nvSpPr>
@@ -4824,7 +4876,7 @@
       </p:sp>
       <p:sp>
         <p:nvSpPr>
-          <p:cNvPr id="14" name="TextBox 13"/>
+          <p:cNvPr id="15" name="TextBox 14"/>
           <p:cNvSpPr txBox="1"/>
           <p:nvPr/>
         </p:nvSpPr>
@@ -4923,7 +4975,7 @@
       </p:sp>
       <p:sp>
         <p:nvSpPr>
-          <p:cNvPr id="15" name="Rectangle 14"/>
+          <p:cNvPr id="16" name="Rectangle 15"/>
           <p:cNvSpPr/>
           <p:nvPr/>
         </p:nvSpPr>
@@ -4964,7 +5016,7 @@
       </p:sp>
       <p:sp>
         <p:nvSpPr>
-          <p:cNvPr id="16" name="Rectangle 15"/>
+          <p:cNvPr id="17" name="Rectangle 16"/>
           <p:cNvSpPr/>
           <p:nvPr/>
         </p:nvSpPr>
@@ -5005,7 +5057,7 @@
       </p:sp>
       <p:sp>
         <p:nvSpPr>
-          <p:cNvPr id="17" name="Rectangle 16"/>
+          <p:cNvPr id="18" name="Rectangle 17"/>
           <p:cNvSpPr/>
           <p:nvPr/>
         </p:nvSpPr>
@@ -5046,7 +5098,7 @@
       </p:sp>
       <p:sp>
         <p:nvSpPr>
-          <p:cNvPr id="18" name="TextBox 17"/>
+          <p:cNvPr id="19" name="TextBox 18"/>
           <p:cNvSpPr txBox="1"/>
           <p:nvPr/>
         </p:nvSpPr>
@@ -5088,7 +5140,7 @@
       </p:sp>
       <p:sp>
         <p:nvSpPr>
-          <p:cNvPr id="19" name="TextBox 18"/>
+          <p:cNvPr id="20" name="TextBox 19"/>
           <p:cNvSpPr txBox="1"/>
           <p:nvPr/>
         </p:nvSpPr>
@@ -5130,7 +5182,7 @@
       </p:sp>
       <p:sp>
         <p:nvSpPr>
-          <p:cNvPr id="20" name="TextBox 19"/>
+          <p:cNvPr id="21" name="TextBox 20"/>
           <p:cNvSpPr txBox="1"/>
           <p:nvPr/>
         </p:nvSpPr>
@@ -5229,7 +5281,7 @@
       </p:sp>
       <p:sp>
         <p:nvSpPr>
-          <p:cNvPr id="21" name="Rectangle 20"/>
+          <p:cNvPr id="22" name="Rectangle 21"/>
           <p:cNvSpPr/>
           <p:nvPr/>
         </p:nvSpPr>
@@ -5270,7 +5322,7 @@
       </p:sp>
       <p:sp>
         <p:nvSpPr>
-          <p:cNvPr id="22" name="Rectangle 21"/>
+          <p:cNvPr id="23" name="Rectangle 22"/>
           <p:cNvSpPr/>
           <p:nvPr/>
         </p:nvSpPr>
@@ -5311,7 +5363,7 @@
       </p:sp>
       <p:sp>
         <p:nvSpPr>
-          <p:cNvPr id="23" name="Rectangle 22"/>
+          <p:cNvPr id="24" name="Rectangle 23"/>
           <p:cNvSpPr/>
           <p:nvPr/>
         </p:nvSpPr>
@@ -5352,7 +5404,7 @@
       </p:sp>
       <p:sp>
         <p:nvSpPr>
-          <p:cNvPr id="24" name="TextBox 23"/>
+          <p:cNvPr id="25" name="TextBox 24"/>
           <p:cNvSpPr txBox="1"/>
           <p:nvPr/>
         </p:nvSpPr>
@@ -5394,7 +5446,7 @@
       </p:sp>
       <p:sp>
         <p:nvSpPr>
-          <p:cNvPr id="25" name="TextBox 24"/>
+          <p:cNvPr id="26" name="TextBox 25"/>
           <p:cNvSpPr txBox="1"/>
           <p:nvPr/>
         </p:nvSpPr>
@@ -5436,7 +5488,7 @@
       </p:sp>
       <p:sp>
         <p:nvSpPr>
-          <p:cNvPr id="26" name="TextBox 25"/>
+          <p:cNvPr id="27" name="TextBox 26"/>
           <p:cNvSpPr txBox="1"/>
           <p:nvPr/>
         </p:nvSpPr>
@@ -5535,7 +5587,7 @@
       </p:sp>
       <p:sp>
         <p:nvSpPr>
-          <p:cNvPr id="27" name="Rectangle 26"/>
+          <p:cNvPr id="28" name="Rectangle 27"/>
           <p:cNvSpPr/>
           <p:nvPr/>
         </p:nvSpPr>
@@ -5578,7 +5630,7 @@
       </p:sp>
       <p:sp>
         <p:nvSpPr>
-          <p:cNvPr id="28" name="Rectangle 27"/>
+          <p:cNvPr id="29" name="Rectangle 28"/>
           <p:cNvSpPr/>
           <p:nvPr/>
         </p:nvSpPr>
@@ -5619,7 +5671,7 @@
       </p:sp>
       <p:sp>
         <p:nvSpPr>
-          <p:cNvPr id="29" name="TextBox 28"/>
+          <p:cNvPr id="30" name="TextBox 29"/>
           <p:cNvSpPr txBox="1"/>
           <p:nvPr/>
         </p:nvSpPr>
@@ -5661,7 +5713,7 @@
       </p:sp>
       <p:sp>
         <p:nvSpPr>
-          <p:cNvPr id="30" name="TextBox 29"/>
+          <p:cNvPr id="31" name="TextBox 30"/>
           <p:cNvSpPr txBox="1"/>
           <p:nvPr/>
         </p:nvSpPr>
@@ -5760,7 +5812,7 @@
       </p:sp>
       <p:sp>
         <p:nvSpPr>
-          <p:cNvPr id="31" name="Rectangle 30"/>
+          <p:cNvPr id="32" name="Rectangle 31"/>
           <p:cNvSpPr/>
           <p:nvPr/>
         </p:nvSpPr>
@@ -5803,7 +5855,7 @@
       </p:sp>
       <p:sp>
         <p:nvSpPr>
-          <p:cNvPr id="32" name="Rectangle 31"/>
+          <p:cNvPr id="33" name="Rectangle 32"/>
           <p:cNvSpPr/>
           <p:nvPr/>
         </p:nvSpPr>
@@ -5844,7 +5896,7 @@
       </p:sp>
       <p:sp>
         <p:nvSpPr>
-          <p:cNvPr id="33" name="TextBox 32"/>
+          <p:cNvPr id="34" name="TextBox 33"/>
           <p:cNvSpPr txBox="1"/>
           <p:nvPr/>
         </p:nvSpPr>
@@ -5886,7 +5938,7 @@
       </p:sp>
       <p:sp>
         <p:nvSpPr>
-          <p:cNvPr id="34" name="TextBox 33"/>
+          <p:cNvPr id="35" name="TextBox 34"/>
           <p:cNvSpPr txBox="1"/>
           <p:nvPr/>
         </p:nvSpPr>
@@ -5985,7 +6037,7 @@
       </p:sp>
       <p:sp>
         <p:nvSpPr>
-          <p:cNvPr id="35" name="Rectangle 34"/>
+          <p:cNvPr id="36" name="Rectangle 35"/>
           <p:cNvSpPr/>
           <p:nvPr/>
         </p:nvSpPr>
@@ -6028,7 +6080,7 @@
       </p:sp>
       <p:sp>
         <p:nvSpPr>
-          <p:cNvPr id="36" name="Rectangle 35"/>
+          <p:cNvPr id="37" name="Rectangle 36"/>
           <p:cNvSpPr/>
           <p:nvPr/>
         </p:nvSpPr>
@@ -6069,7 +6121,7 @@
       </p:sp>
       <p:sp>
         <p:nvSpPr>
-          <p:cNvPr id="37" name="TextBox 36"/>
+          <p:cNvPr id="38" name="TextBox 37"/>
           <p:cNvSpPr txBox="1"/>
           <p:nvPr/>
         </p:nvSpPr>
@@ -6111,7 +6163,7 @@
       </p:sp>
       <p:sp>
         <p:nvSpPr>
-          <p:cNvPr id="38" name="TextBox 37"/>
+          <p:cNvPr id="39" name="TextBox 38"/>
           <p:cNvSpPr txBox="1"/>
           <p:nvPr/>
         </p:nvSpPr>
@@ -6210,7 +6262,7 @@
       </p:sp>
       <p:sp>
         <p:nvSpPr>
-          <p:cNvPr id="39" name="Rectangle 38"/>
+          <p:cNvPr id="40" name="Rectangle 39"/>
           <p:cNvSpPr/>
           <p:nvPr/>
         </p:nvSpPr>
@@ -6253,7 +6305,7 @@
       </p:sp>
       <p:sp>
         <p:nvSpPr>
-          <p:cNvPr id="40" name="Rectangle 39"/>
+          <p:cNvPr id="41" name="Rectangle 40"/>
           <p:cNvSpPr/>
           <p:nvPr/>
         </p:nvSpPr>
@@ -6294,7 +6346,7 @@
       </p:sp>
       <p:sp>
         <p:nvSpPr>
-          <p:cNvPr id="41" name="TextBox 40"/>
+          <p:cNvPr id="42" name="TextBox 41"/>
           <p:cNvSpPr txBox="1"/>
           <p:nvPr/>
         </p:nvSpPr>
@@ -6412,7 +6464,7 @@
       </p:sp>
       <p:sp>
         <p:nvSpPr>
-          <p:cNvPr id="42" name="TextBox 41"/>
+          <p:cNvPr id="43" name="TextBox 42"/>
           <p:cNvSpPr txBox="1"/>
           <p:nvPr/>
         </p:nvSpPr>

--- a/assets/memos/E6-memo.pptx
+++ b/assets/memos/E6-memo.pptx
@@ -3084,9 +3084,12 @@
   <p:cSld>
     <p:bg>
       <p:bgPr>
-        <a:solidFill>
-          <a:srgbClr val="FFFFFF"/>
-        </a:solidFill>
+        <a:blipFill>
+          <a:blip r:embed="rId2"/>
+          <a:stretch>
+            <a:fillRect/>
+          </a:stretch>
+        </a:blipFill>
         <a:effectLst/>
       </p:bgPr>
     </p:bg>
@@ -3097,35 +3100,9 @@
         <p:nvPr/>
       </p:nvGrpSpPr>
       <p:grpSpPr/>
-      <p:pic>
-        <p:nvPicPr>
-          <p:cNvPr id="2" name="Picture 1" descr="bg-p1.png"/>
-          <p:cNvPicPr>
-            <a:picLocks noChangeAspect="1"/>
-          </p:cNvPicPr>
-          <p:nvPr/>
-        </p:nvPicPr>
-        <p:blipFill>
-          <a:blip r:embed="rId2">
-            <a:alphaModFix amt="80000"/>
-          </a:blip>
-          <a:stretch>
-            <a:fillRect/>
-          </a:stretch>
-        </p:blipFill>
-        <p:spPr>
-          <a:xfrm>
-            <a:off x="0" y="0"/>
-            <a:ext cx="7556399" cy="10692000"/>
-          </a:xfrm>
-          <a:prstGeom prst="rect">
-            <a:avLst/>
-          </a:prstGeom>
-        </p:spPr>
-      </p:pic>
-      <p:sp>
-        <p:nvSpPr>
-          <p:cNvPr id="3" name="TextBox 2"/>
+      <p:sp>
+        <p:nvSpPr>
+          <p:cNvPr id="2" name="TextBox 1"/>
           <p:cNvSpPr txBox="1"/>
           <p:nvPr/>
         </p:nvSpPr>
@@ -3186,7 +3163,7 @@
       </p:sp>
       <p:sp>
         <p:nvSpPr>
-          <p:cNvPr id="4" name="Rectangle 3"/>
+          <p:cNvPr id="3" name="Rectangle 2"/>
           <p:cNvSpPr/>
           <p:nvPr/>
         </p:nvSpPr>
@@ -3227,7 +3204,7 @@
       </p:sp>
       <p:sp>
         <p:nvSpPr>
-          <p:cNvPr id="5" name="Rectangle 4"/>
+          <p:cNvPr id="4" name="Rectangle 3"/>
           <p:cNvSpPr/>
           <p:nvPr/>
         </p:nvSpPr>
@@ -3268,7 +3245,7 @@
       </p:sp>
       <p:sp>
         <p:nvSpPr>
-          <p:cNvPr id="6" name="Rectangle 5"/>
+          <p:cNvPr id="5" name="Rectangle 4"/>
           <p:cNvSpPr/>
           <p:nvPr/>
         </p:nvSpPr>
@@ -3309,7 +3286,7 @@
       </p:sp>
       <p:sp>
         <p:nvSpPr>
-          <p:cNvPr id="7" name="TextBox 6"/>
+          <p:cNvPr id="6" name="TextBox 5"/>
           <p:cNvSpPr txBox="1"/>
           <p:nvPr/>
         </p:nvSpPr>
@@ -3351,7 +3328,7 @@
       </p:sp>
       <p:sp>
         <p:nvSpPr>
-          <p:cNvPr id="8" name="TextBox 7"/>
+          <p:cNvPr id="7" name="TextBox 6"/>
           <p:cNvSpPr txBox="1"/>
           <p:nvPr/>
         </p:nvSpPr>
@@ -3393,7 +3370,7 @@
       </p:sp>
       <p:sp>
         <p:nvSpPr>
-          <p:cNvPr id="9" name="TextBox 8"/>
+          <p:cNvPr id="8" name="TextBox 7"/>
           <p:cNvSpPr txBox="1"/>
           <p:nvPr/>
         </p:nvSpPr>
@@ -3492,7 +3469,7 @@
       </p:sp>
       <p:sp>
         <p:nvSpPr>
-          <p:cNvPr id="10" name="Rectangle 9"/>
+          <p:cNvPr id="9" name="Rectangle 8"/>
           <p:cNvSpPr/>
           <p:nvPr/>
         </p:nvSpPr>
@@ -3533,7 +3510,7 @@
       </p:sp>
       <p:sp>
         <p:nvSpPr>
-          <p:cNvPr id="11" name="Rectangle 10"/>
+          <p:cNvPr id="10" name="Rectangle 9"/>
           <p:cNvSpPr/>
           <p:nvPr/>
         </p:nvSpPr>
@@ -3574,7 +3551,7 @@
       </p:sp>
       <p:sp>
         <p:nvSpPr>
-          <p:cNvPr id="12" name="Rectangle 11"/>
+          <p:cNvPr id="11" name="Rectangle 10"/>
           <p:cNvSpPr/>
           <p:nvPr/>
         </p:nvSpPr>
@@ -3615,7 +3592,7 @@
       </p:sp>
       <p:sp>
         <p:nvSpPr>
-          <p:cNvPr id="13" name="TextBox 12"/>
+          <p:cNvPr id="12" name="TextBox 11"/>
           <p:cNvSpPr txBox="1"/>
           <p:nvPr/>
         </p:nvSpPr>
@@ -3657,7 +3634,7 @@
       </p:sp>
       <p:sp>
         <p:nvSpPr>
-          <p:cNvPr id="14" name="TextBox 13"/>
+          <p:cNvPr id="13" name="TextBox 12"/>
           <p:cNvSpPr txBox="1"/>
           <p:nvPr/>
         </p:nvSpPr>
@@ -3699,7 +3676,7 @@
       </p:sp>
       <p:sp>
         <p:nvSpPr>
-          <p:cNvPr id="15" name="TextBox 14"/>
+          <p:cNvPr id="14" name="TextBox 13"/>
           <p:cNvSpPr txBox="1"/>
           <p:nvPr/>
         </p:nvSpPr>
@@ -3798,7 +3775,7 @@
       </p:sp>
       <p:sp>
         <p:nvSpPr>
-          <p:cNvPr id="16" name="Rectangle 15"/>
+          <p:cNvPr id="15" name="Rectangle 14"/>
           <p:cNvSpPr/>
           <p:nvPr/>
         </p:nvSpPr>
@@ -3839,7 +3816,7 @@
       </p:sp>
       <p:sp>
         <p:nvSpPr>
-          <p:cNvPr id="17" name="Rectangle 16"/>
+          <p:cNvPr id="16" name="Rectangle 15"/>
           <p:cNvSpPr/>
           <p:nvPr/>
         </p:nvSpPr>
@@ -3880,7 +3857,7 @@
       </p:sp>
       <p:sp>
         <p:nvSpPr>
-          <p:cNvPr id="18" name="Rectangle 17"/>
+          <p:cNvPr id="17" name="Rectangle 16"/>
           <p:cNvSpPr/>
           <p:nvPr/>
         </p:nvSpPr>
@@ -3921,7 +3898,7 @@
       </p:sp>
       <p:sp>
         <p:nvSpPr>
-          <p:cNvPr id="19" name="TextBox 18"/>
+          <p:cNvPr id="18" name="TextBox 17"/>
           <p:cNvSpPr txBox="1"/>
           <p:nvPr/>
         </p:nvSpPr>
@@ -3963,7 +3940,7 @@
       </p:sp>
       <p:sp>
         <p:nvSpPr>
-          <p:cNvPr id="20" name="TextBox 19"/>
+          <p:cNvPr id="19" name="TextBox 18"/>
           <p:cNvSpPr txBox="1"/>
           <p:nvPr/>
         </p:nvSpPr>
@@ -4005,7 +3982,7 @@
       </p:sp>
       <p:sp>
         <p:nvSpPr>
-          <p:cNvPr id="21" name="TextBox 20"/>
+          <p:cNvPr id="20" name="TextBox 19"/>
           <p:cNvSpPr txBox="1"/>
           <p:nvPr/>
         </p:nvSpPr>
@@ -4104,7 +4081,7 @@
       </p:sp>
       <p:sp>
         <p:nvSpPr>
-          <p:cNvPr id="22" name="Rectangle 21"/>
+          <p:cNvPr id="21" name="Rectangle 20"/>
           <p:cNvSpPr/>
           <p:nvPr/>
         </p:nvSpPr>
@@ -4147,7 +4124,7 @@
       </p:sp>
       <p:sp>
         <p:nvSpPr>
-          <p:cNvPr id="23" name="TextBox 22"/>
+          <p:cNvPr id="22" name="TextBox 21"/>
           <p:cNvSpPr txBox="1"/>
           <p:nvPr/>
         </p:nvSpPr>
@@ -4208,7 +4185,7 @@
       </p:sp>
       <p:sp>
         <p:nvSpPr>
-          <p:cNvPr id="24" name="TextBox 23"/>
+          <p:cNvPr id="23" name="TextBox 22"/>
           <p:cNvSpPr txBox="1"/>
           <p:nvPr/>
         </p:nvSpPr>
@@ -4261,9 +4238,12 @@
   <p:cSld>
     <p:bg>
       <p:bgPr>
-        <a:solidFill>
-          <a:srgbClr val="FFFFFF"/>
-        </a:solidFill>
+        <a:blipFill>
+          <a:blip r:embed="rId2"/>
+          <a:stretch>
+            <a:fillRect/>
+          </a:stretch>
+        </a:blipFill>
         <a:effectLst/>
       </p:bgPr>
     </p:bg>
@@ -4274,35 +4254,9 @@
         <p:nvPr/>
       </p:nvGrpSpPr>
       <p:grpSpPr/>
-      <p:pic>
-        <p:nvPicPr>
-          <p:cNvPr id="2" name="Picture 1" descr="bg-p2.png"/>
-          <p:cNvPicPr>
-            <a:picLocks noChangeAspect="1"/>
-          </p:cNvPicPr>
-          <p:nvPr/>
-        </p:nvPicPr>
-        <p:blipFill>
-          <a:blip r:embed="rId2">
-            <a:alphaModFix amt="80000"/>
-          </a:blip>
-          <a:stretch>
-            <a:fillRect/>
-          </a:stretch>
-        </p:blipFill>
-        <p:spPr>
-          <a:xfrm>
-            <a:off x="0" y="0"/>
-            <a:ext cx="7556399" cy="10692000"/>
-          </a:xfrm>
-          <a:prstGeom prst="rect">
-            <a:avLst/>
-          </a:prstGeom>
-        </p:spPr>
-      </p:pic>
-      <p:sp>
-        <p:nvSpPr>
-          <p:cNvPr id="3" name="TextBox 2"/>
+      <p:sp>
+        <p:nvSpPr>
+          <p:cNvPr id="2" name="TextBox 1"/>
           <p:cNvSpPr txBox="1"/>
           <p:nvPr/>
         </p:nvSpPr>
@@ -4363,7 +4317,7 @@
       </p:sp>
       <p:sp>
         <p:nvSpPr>
-          <p:cNvPr id="4" name="Rectangle 3"/>
+          <p:cNvPr id="3" name="Rectangle 2"/>
           <p:cNvSpPr/>
           <p:nvPr/>
         </p:nvSpPr>
@@ -4404,7 +4358,7 @@
       </p:sp>
       <p:sp>
         <p:nvSpPr>
-          <p:cNvPr id="5" name="Rectangle 4"/>
+          <p:cNvPr id="4" name="Rectangle 3"/>
           <p:cNvSpPr/>
           <p:nvPr/>
         </p:nvSpPr>
@@ -4445,7 +4399,7 @@
       </p:sp>
       <p:sp>
         <p:nvSpPr>
-          <p:cNvPr id="6" name="Rectangle 5"/>
+          <p:cNvPr id="5" name="Rectangle 4"/>
           <p:cNvSpPr/>
           <p:nvPr/>
         </p:nvSpPr>
@@ -4486,7 +4440,7 @@
       </p:sp>
       <p:sp>
         <p:nvSpPr>
-          <p:cNvPr id="7" name="TextBox 6"/>
+          <p:cNvPr id="6" name="TextBox 5"/>
           <p:cNvSpPr txBox="1"/>
           <p:nvPr/>
         </p:nvSpPr>
@@ -4528,7 +4482,7 @@
       </p:sp>
       <p:sp>
         <p:nvSpPr>
-          <p:cNvPr id="8" name="TextBox 7"/>
+          <p:cNvPr id="7" name="TextBox 6"/>
           <p:cNvSpPr txBox="1"/>
           <p:nvPr/>
         </p:nvSpPr>
@@ -4570,7 +4524,7 @@
       </p:sp>
       <p:sp>
         <p:nvSpPr>
-          <p:cNvPr id="9" name="TextBox 8"/>
+          <p:cNvPr id="8" name="TextBox 7"/>
           <p:cNvSpPr txBox="1"/>
           <p:nvPr/>
         </p:nvSpPr>
@@ -4669,7 +4623,7 @@
       </p:sp>
       <p:sp>
         <p:nvSpPr>
-          <p:cNvPr id="10" name="Rectangle 9"/>
+          <p:cNvPr id="9" name="Rectangle 8"/>
           <p:cNvSpPr/>
           <p:nvPr/>
         </p:nvSpPr>
@@ -4710,7 +4664,7 @@
       </p:sp>
       <p:sp>
         <p:nvSpPr>
-          <p:cNvPr id="11" name="Rectangle 10"/>
+          <p:cNvPr id="10" name="Rectangle 9"/>
           <p:cNvSpPr/>
           <p:nvPr/>
         </p:nvSpPr>
@@ -4751,7 +4705,7 @@
       </p:sp>
       <p:sp>
         <p:nvSpPr>
-          <p:cNvPr id="12" name="Rectangle 11"/>
+          <p:cNvPr id="11" name="Rectangle 10"/>
           <p:cNvSpPr/>
           <p:nvPr/>
         </p:nvSpPr>
@@ -4792,7 +4746,7 @@
       </p:sp>
       <p:sp>
         <p:nvSpPr>
-          <p:cNvPr id="13" name="TextBox 12"/>
+          <p:cNvPr id="12" name="TextBox 11"/>
           <p:cNvSpPr txBox="1"/>
           <p:nvPr/>
         </p:nvSpPr>
@@ -4834,7 +4788,7 @@
       </p:sp>
       <p:sp>
         <p:nvSpPr>
-          <p:cNvPr id="14" name="TextBox 13"/>
+          <p:cNvPr id="13" name="TextBox 12"/>
           <p:cNvSpPr txBox="1"/>
           <p:nvPr/>
         </p:nvSpPr>
@@ -4876,7 +4830,7 @@
       </p:sp>
       <p:sp>
         <p:nvSpPr>
-          <p:cNvPr id="15" name="TextBox 14"/>
+          <p:cNvPr id="14" name="TextBox 13"/>
           <p:cNvSpPr txBox="1"/>
           <p:nvPr/>
         </p:nvSpPr>
@@ -4975,7 +4929,7 @@
       </p:sp>
       <p:sp>
         <p:nvSpPr>
-          <p:cNvPr id="16" name="Rectangle 15"/>
+          <p:cNvPr id="15" name="Rectangle 14"/>
           <p:cNvSpPr/>
           <p:nvPr/>
         </p:nvSpPr>
@@ -5016,7 +4970,7 @@
       </p:sp>
       <p:sp>
         <p:nvSpPr>
-          <p:cNvPr id="17" name="Rectangle 16"/>
+          <p:cNvPr id="16" name="Rectangle 15"/>
           <p:cNvSpPr/>
           <p:nvPr/>
         </p:nvSpPr>
@@ -5057,7 +5011,7 @@
       </p:sp>
       <p:sp>
         <p:nvSpPr>
-          <p:cNvPr id="18" name="Rectangle 17"/>
+          <p:cNvPr id="17" name="Rectangle 16"/>
           <p:cNvSpPr/>
           <p:nvPr/>
         </p:nvSpPr>
@@ -5098,7 +5052,7 @@
       </p:sp>
       <p:sp>
         <p:nvSpPr>
-          <p:cNvPr id="19" name="TextBox 18"/>
+          <p:cNvPr id="18" name="TextBox 17"/>
           <p:cNvSpPr txBox="1"/>
           <p:nvPr/>
         </p:nvSpPr>
@@ -5140,7 +5094,7 @@
       </p:sp>
       <p:sp>
         <p:nvSpPr>
-          <p:cNvPr id="20" name="TextBox 19"/>
+          <p:cNvPr id="19" name="TextBox 18"/>
           <p:cNvSpPr txBox="1"/>
           <p:nvPr/>
         </p:nvSpPr>
@@ -5182,7 +5136,7 @@
       </p:sp>
       <p:sp>
         <p:nvSpPr>
-          <p:cNvPr id="21" name="TextBox 20"/>
+          <p:cNvPr id="20" name="TextBox 19"/>
           <p:cNvSpPr txBox="1"/>
           <p:nvPr/>
         </p:nvSpPr>
@@ -5281,7 +5235,7 @@
       </p:sp>
       <p:sp>
         <p:nvSpPr>
-          <p:cNvPr id="22" name="Rectangle 21"/>
+          <p:cNvPr id="21" name="Rectangle 20"/>
           <p:cNvSpPr/>
           <p:nvPr/>
         </p:nvSpPr>
@@ -5322,7 +5276,7 @@
       </p:sp>
       <p:sp>
         <p:nvSpPr>
-          <p:cNvPr id="23" name="Rectangle 22"/>
+          <p:cNvPr id="22" name="Rectangle 21"/>
           <p:cNvSpPr/>
           <p:nvPr/>
         </p:nvSpPr>
@@ -5363,7 +5317,7 @@
       </p:sp>
       <p:sp>
         <p:nvSpPr>
-          <p:cNvPr id="24" name="Rectangle 23"/>
+          <p:cNvPr id="23" name="Rectangle 22"/>
           <p:cNvSpPr/>
           <p:nvPr/>
         </p:nvSpPr>
@@ -5404,7 +5358,7 @@
       </p:sp>
       <p:sp>
         <p:nvSpPr>
-          <p:cNvPr id="25" name="TextBox 24"/>
+          <p:cNvPr id="24" name="TextBox 23"/>
           <p:cNvSpPr txBox="1"/>
           <p:nvPr/>
         </p:nvSpPr>
@@ -5446,7 +5400,7 @@
       </p:sp>
       <p:sp>
         <p:nvSpPr>
-          <p:cNvPr id="26" name="TextBox 25"/>
+          <p:cNvPr id="25" name="TextBox 24"/>
           <p:cNvSpPr txBox="1"/>
           <p:nvPr/>
         </p:nvSpPr>
@@ -5488,7 +5442,7 @@
       </p:sp>
       <p:sp>
         <p:nvSpPr>
-          <p:cNvPr id="27" name="TextBox 26"/>
+          <p:cNvPr id="26" name="TextBox 25"/>
           <p:cNvSpPr txBox="1"/>
           <p:nvPr/>
         </p:nvSpPr>
@@ -5587,7 +5541,7 @@
       </p:sp>
       <p:sp>
         <p:nvSpPr>
-          <p:cNvPr id="28" name="Rectangle 27"/>
+          <p:cNvPr id="27" name="Rectangle 26"/>
           <p:cNvSpPr/>
           <p:nvPr/>
         </p:nvSpPr>
@@ -5630,7 +5584,7 @@
       </p:sp>
       <p:sp>
         <p:nvSpPr>
-          <p:cNvPr id="29" name="Rectangle 28"/>
+          <p:cNvPr id="28" name="Rectangle 27"/>
           <p:cNvSpPr/>
           <p:nvPr/>
         </p:nvSpPr>
@@ -5671,7 +5625,7 @@
       </p:sp>
       <p:sp>
         <p:nvSpPr>
-          <p:cNvPr id="30" name="TextBox 29"/>
+          <p:cNvPr id="29" name="TextBox 28"/>
           <p:cNvSpPr txBox="1"/>
           <p:nvPr/>
         </p:nvSpPr>
@@ -5713,7 +5667,7 @@
       </p:sp>
       <p:sp>
         <p:nvSpPr>
-          <p:cNvPr id="31" name="TextBox 30"/>
+          <p:cNvPr id="30" name="TextBox 29"/>
           <p:cNvSpPr txBox="1"/>
           <p:nvPr/>
         </p:nvSpPr>
@@ -5812,7 +5766,7 @@
       </p:sp>
       <p:sp>
         <p:nvSpPr>
-          <p:cNvPr id="32" name="Rectangle 31"/>
+          <p:cNvPr id="31" name="Rectangle 30"/>
           <p:cNvSpPr/>
           <p:nvPr/>
         </p:nvSpPr>
@@ -5855,7 +5809,7 @@
       </p:sp>
       <p:sp>
         <p:nvSpPr>
-          <p:cNvPr id="33" name="Rectangle 32"/>
+          <p:cNvPr id="32" name="Rectangle 31"/>
           <p:cNvSpPr/>
           <p:nvPr/>
         </p:nvSpPr>
@@ -5896,7 +5850,7 @@
       </p:sp>
       <p:sp>
         <p:nvSpPr>
-          <p:cNvPr id="34" name="TextBox 33"/>
+          <p:cNvPr id="33" name="TextBox 32"/>
           <p:cNvSpPr txBox="1"/>
           <p:nvPr/>
         </p:nvSpPr>
@@ -5938,7 +5892,7 @@
       </p:sp>
       <p:sp>
         <p:nvSpPr>
-          <p:cNvPr id="35" name="TextBox 34"/>
+          <p:cNvPr id="34" name="TextBox 33"/>
           <p:cNvSpPr txBox="1"/>
           <p:nvPr/>
         </p:nvSpPr>
@@ -6037,7 +5991,7 @@
       </p:sp>
       <p:sp>
         <p:nvSpPr>
-          <p:cNvPr id="36" name="Rectangle 35"/>
+          <p:cNvPr id="35" name="Rectangle 34"/>
           <p:cNvSpPr/>
           <p:nvPr/>
         </p:nvSpPr>
@@ -6080,7 +6034,7 @@
       </p:sp>
       <p:sp>
         <p:nvSpPr>
-          <p:cNvPr id="37" name="Rectangle 36"/>
+          <p:cNvPr id="36" name="Rectangle 35"/>
           <p:cNvSpPr/>
           <p:nvPr/>
         </p:nvSpPr>
@@ -6121,7 +6075,7 @@
       </p:sp>
       <p:sp>
         <p:nvSpPr>
-          <p:cNvPr id="38" name="TextBox 37"/>
+          <p:cNvPr id="37" name="TextBox 36"/>
           <p:cNvSpPr txBox="1"/>
           <p:nvPr/>
         </p:nvSpPr>
@@ -6163,7 +6117,7 @@
       </p:sp>
       <p:sp>
         <p:nvSpPr>
-          <p:cNvPr id="39" name="TextBox 38"/>
+          <p:cNvPr id="38" name="TextBox 37"/>
           <p:cNvSpPr txBox="1"/>
           <p:nvPr/>
         </p:nvSpPr>
@@ -6262,7 +6216,7 @@
       </p:sp>
       <p:sp>
         <p:nvSpPr>
-          <p:cNvPr id="40" name="Rectangle 39"/>
+          <p:cNvPr id="39" name="Rectangle 38"/>
           <p:cNvSpPr/>
           <p:nvPr/>
         </p:nvSpPr>
@@ -6305,7 +6259,7 @@
       </p:sp>
       <p:sp>
         <p:nvSpPr>
-          <p:cNvPr id="41" name="Rectangle 40"/>
+          <p:cNvPr id="40" name="Rectangle 39"/>
           <p:cNvSpPr/>
           <p:nvPr/>
         </p:nvSpPr>
@@ -6346,7 +6300,7 @@
       </p:sp>
       <p:sp>
         <p:nvSpPr>
-          <p:cNvPr id="42" name="TextBox 41"/>
+          <p:cNvPr id="41" name="TextBox 40"/>
           <p:cNvSpPr txBox="1"/>
           <p:nvPr/>
         </p:nvSpPr>
@@ -6464,7 +6418,7 @@
       </p:sp>
       <p:sp>
         <p:nvSpPr>
-          <p:cNvPr id="43" name="TextBox 42"/>
+          <p:cNvPr id="42" name="TextBox 41"/>
           <p:cNvSpPr txBox="1"/>
           <p:nvPr/>
         </p:nvSpPr>
